--- a/projects/similarity-metric/poster/Poster_GSC_TN.pptx
+++ b/projects/similarity-metric/poster/Poster_GSC_TN.pptx
@@ -153,6 +153,7 @@
 <p1510:revInfo xmlns:a="http://schemas.openxmlformats.org/drawingml/2006/main" xmlns:r="http://schemas.openxmlformats.org/officeDocument/2006/relationships" xmlns:p1510="http://schemas.microsoft.com/office/powerpoint/2015/10/main">
   <p1510:revLst>
     <p1510:client id="{7ADFE088-2B71-4022-BB0E-56235048CBA0}" v="2159" dt="2026-05-07T13:36:12.099"/>
+    <p1510:client id="{AB6AB97A-F069-4532-8FA9-A1E5830839B5}" v="11" dt="2026-05-07T22:12:13.322"/>
   </p1510:revLst>
 </p1510:revInfo>
 </file>
@@ -162,7 +163,7 @@
   <pc:docChgLst>
     <pc:chgData name="Takashi Nagakubo" userId="a3159dfb-051d-4354-9117-5c504819107f" providerId="ADAL" clId="{17E4AD61-51CE-4FCD-9176-040DC996909B}"/>
     <pc:docChg chg="undo custSel mod addSld delSld modSld">
-      <pc:chgData name="Takashi Nagakubo" userId="a3159dfb-051d-4354-9117-5c504819107f" providerId="ADAL" clId="{17E4AD61-51CE-4FCD-9176-040DC996909B}" dt="2026-05-07T13:37:02.676" v="9943" actId="1036"/>
+      <pc:chgData name="Takashi Nagakubo" userId="a3159dfb-051d-4354-9117-5c504819107f" providerId="ADAL" clId="{17E4AD61-51CE-4FCD-9176-040DC996909B}" dt="2026-05-07T22:12:13.322" v="9954"/>
       <pc:docMkLst>
         <pc:docMk/>
       </pc:docMkLst>
@@ -269,7 +270,7 @@
         </pc:spChg>
       </pc:sldChg>
       <pc:sldChg chg="addSp delSp modSp add mod">
-        <pc:chgData name="Takashi Nagakubo" userId="a3159dfb-051d-4354-9117-5c504819107f" providerId="ADAL" clId="{17E4AD61-51CE-4FCD-9176-040DC996909B}" dt="2026-05-07T13:37:02.676" v="9943" actId="1036"/>
+        <pc:chgData name="Takashi Nagakubo" userId="a3159dfb-051d-4354-9117-5c504819107f" providerId="ADAL" clId="{17E4AD61-51CE-4FCD-9176-040DC996909B}" dt="2026-05-07T22:12:13.322" v="9954"/>
         <pc:sldMkLst>
           <pc:docMk/>
           <pc:sldMk cId="30174465" sldId="263"/>
@@ -299,7 +300,7 @@
           </ac:grpSpMkLst>
         </pc:grpChg>
         <pc:graphicFrameChg chg="mod ord modGraphic">
-          <ac:chgData name="Takashi Nagakubo" userId="a3159dfb-051d-4354-9117-5c504819107f" providerId="ADAL" clId="{17E4AD61-51CE-4FCD-9176-040DC996909B}" dt="2026-05-07T13:35:52.483" v="9935"/>
+          <ac:chgData name="Takashi Nagakubo" userId="a3159dfb-051d-4354-9117-5c504819107f" providerId="ADAL" clId="{17E4AD61-51CE-4FCD-9176-040DC996909B}" dt="2026-05-07T22:12:13.322" v="9954"/>
           <ac:graphicFrameMkLst>
             <pc:docMk/>
             <pc:sldMk cId="30174465" sldId="263"/>
@@ -1902,6 +1903,753 @@
 </dgm:colorsDef>
 </file>
 
+<file path=ppt/diagrams/colors20.xml><?xml version="1.0" encoding="utf-8"?>
+<dgm:colorsDef xmlns:dgm="http://schemas.openxmlformats.org/drawingml/2006/diagram" xmlns:a="http://schemas.openxmlformats.org/drawingml/2006/main" uniqueId="urn:microsoft.com/office/officeart/2005/8/colors/accent1_2">
+  <dgm:title val=""/>
+  <dgm:desc val=""/>
+  <dgm:catLst>
+    <dgm:cat type="accent1" pri="11200"/>
+  </dgm:catLst>
+  <dgm:styleLbl name="node0">
+    <dgm:fillClrLst meth="repeat">
+      <a:schemeClr val="accent1"/>
+    </dgm:fillClrLst>
+    <dgm:linClrLst meth="repeat">
+      <a:schemeClr val="lt1"/>
+    </dgm:linClrLst>
+    <dgm:effectClrLst/>
+    <dgm:txLinClrLst/>
+    <dgm:txFillClrLst/>
+    <dgm:txEffectClrLst/>
+  </dgm:styleLbl>
+  <dgm:styleLbl name="alignNode1">
+    <dgm:fillClrLst meth="repeat">
+      <a:schemeClr val="accent1"/>
+    </dgm:fillClrLst>
+    <dgm:linClrLst meth="repeat">
+      <a:schemeClr val="accent1"/>
+    </dgm:linClrLst>
+    <dgm:effectClrLst/>
+    <dgm:txLinClrLst/>
+    <dgm:txFillClrLst/>
+    <dgm:txEffectClrLst/>
+  </dgm:styleLbl>
+  <dgm:styleLbl name="node1">
+    <dgm:fillClrLst meth="repeat">
+      <a:schemeClr val="accent1"/>
+    </dgm:fillClrLst>
+    <dgm:linClrLst meth="repeat">
+      <a:schemeClr val="lt1"/>
+    </dgm:linClrLst>
+    <dgm:effectClrLst/>
+    <dgm:txLinClrLst/>
+    <dgm:txFillClrLst/>
+    <dgm:txEffectClrLst/>
+  </dgm:styleLbl>
+  <dgm:styleLbl name="lnNode1">
+    <dgm:fillClrLst meth="repeat">
+      <a:schemeClr val="accent1"/>
+    </dgm:fillClrLst>
+    <dgm:linClrLst meth="repeat">
+      <a:schemeClr val="lt1"/>
+    </dgm:linClrLst>
+    <dgm:effectClrLst/>
+    <dgm:txLinClrLst/>
+    <dgm:txFillClrLst/>
+    <dgm:txEffectClrLst/>
+  </dgm:styleLbl>
+  <dgm:styleLbl name="vennNode1">
+    <dgm:fillClrLst meth="repeat">
+      <a:schemeClr val="accent1">
+        <a:alpha val="50000"/>
+      </a:schemeClr>
+    </dgm:fillClrLst>
+    <dgm:linClrLst meth="repeat">
+      <a:schemeClr val="lt1"/>
+    </dgm:linClrLst>
+    <dgm:effectClrLst/>
+    <dgm:txLinClrLst/>
+    <dgm:txFillClrLst/>
+    <dgm:txEffectClrLst/>
+  </dgm:styleLbl>
+  <dgm:styleLbl name="node2">
+    <dgm:fillClrLst meth="repeat">
+      <a:schemeClr val="accent1"/>
+    </dgm:fillClrLst>
+    <dgm:linClrLst meth="repeat">
+      <a:schemeClr val="lt1"/>
+    </dgm:linClrLst>
+    <dgm:effectClrLst/>
+    <dgm:txLinClrLst/>
+    <dgm:txFillClrLst/>
+    <dgm:txEffectClrLst/>
+  </dgm:styleLbl>
+  <dgm:styleLbl name="node3">
+    <dgm:fillClrLst meth="repeat">
+      <a:schemeClr val="accent1"/>
+    </dgm:fillClrLst>
+    <dgm:linClrLst meth="repeat">
+      <a:schemeClr val="lt1"/>
+    </dgm:linClrLst>
+    <dgm:effectClrLst/>
+    <dgm:txLinClrLst/>
+    <dgm:txFillClrLst/>
+    <dgm:txEffectClrLst/>
+  </dgm:styleLbl>
+  <dgm:styleLbl name="node4">
+    <dgm:fillClrLst meth="repeat">
+      <a:schemeClr val="accent1"/>
+    </dgm:fillClrLst>
+    <dgm:linClrLst meth="repeat">
+      <a:schemeClr val="lt1"/>
+    </dgm:linClrLst>
+    <dgm:effectClrLst/>
+    <dgm:txLinClrLst/>
+    <dgm:txFillClrLst/>
+    <dgm:txEffectClrLst/>
+  </dgm:styleLbl>
+  <dgm:styleLbl name="fgImgPlace1">
+    <dgm:fillClrLst meth="repeat">
+      <a:schemeClr val="accent1">
+        <a:tint val="50000"/>
+      </a:schemeClr>
+    </dgm:fillClrLst>
+    <dgm:linClrLst meth="repeat">
+      <a:schemeClr val="lt1"/>
+    </dgm:linClrLst>
+    <dgm:effectClrLst/>
+    <dgm:txLinClrLst/>
+    <dgm:txFillClrLst meth="repeat">
+      <a:schemeClr val="lt1"/>
+    </dgm:txFillClrLst>
+    <dgm:txEffectClrLst/>
+  </dgm:styleLbl>
+  <dgm:styleLbl name="alignImgPlace1">
+    <dgm:fillClrLst meth="repeat">
+      <a:schemeClr val="accent1">
+        <a:tint val="50000"/>
+      </a:schemeClr>
+    </dgm:fillClrLst>
+    <dgm:linClrLst meth="repeat">
+      <a:schemeClr val="lt1"/>
+    </dgm:linClrLst>
+    <dgm:effectClrLst/>
+    <dgm:txLinClrLst/>
+    <dgm:txFillClrLst meth="repeat">
+      <a:schemeClr val="lt1"/>
+    </dgm:txFillClrLst>
+    <dgm:txEffectClrLst/>
+  </dgm:styleLbl>
+  <dgm:styleLbl name="bgImgPlace1">
+    <dgm:fillClrLst meth="repeat">
+      <a:schemeClr val="accent1">
+        <a:tint val="50000"/>
+      </a:schemeClr>
+    </dgm:fillClrLst>
+    <dgm:linClrLst meth="repeat">
+      <a:schemeClr val="lt1"/>
+    </dgm:linClrLst>
+    <dgm:effectClrLst/>
+    <dgm:txLinClrLst/>
+    <dgm:txFillClrLst meth="repeat">
+      <a:schemeClr val="lt1"/>
+    </dgm:txFillClrLst>
+    <dgm:txEffectClrLst/>
+  </dgm:styleLbl>
+  <dgm:styleLbl name="sibTrans2D1">
+    <dgm:fillClrLst meth="repeat">
+      <a:schemeClr val="accent1">
+        <a:tint val="60000"/>
+      </a:schemeClr>
+    </dgm:fillClrLst>
+    <dgm:linClrLst meth="repeat">
+      <a:schemeClr val="accent1">
+        <a:tint val="60000"/>
+      </a:schemeClr>
+    </dgm:linClrLst>
+    <dgm:effectClrLst/>
+    <dgm:txLinClrLst/>
+    <dgm:txFillClrLst/>
+    <dgm:txEffectClrLst/>
+  </dgm:styleLbl>
+  <dgm:styleLbl name="fgSibTrans2D1">
+    <dgm:fillClrLst meth="repeat">
+      <a:schemeClr val="accent1">
+        <a:tint val="60000"/>
+      </a:schemeClr>
+    </dgm:fillClrLst>
+    <dgm:linClrLst meth="repeat">
+      <a:schemeClr val="accent1">
+        <a:tint val="60000"/>
+      </a:schemeClr>
+    </dgm:linClrLst>
+    <dgm:effectClrLst/>
+    <dgm:txLinClrLst/>
+    <dgm:txFillClrLst/>
+    <dgm:txEffectClrLst/>
+  </dgm:styleLbl>
+  <dgm:styleLbl name="bgSibTrans2D1">
+    <dgm:fillClrLst meth="repeat">
+      <a:schemeClr val="accent1">
+        <a:tint val="60000"/>
+      </a:schemeClr>
+    </dgm:fillClrLst>
+    <dgm:linClrLst meth="repeat">
+      <a:schemeClr val="accent1">
+        <a:tint val="60000"/>
+      </a:schemeClr>
+    </dgm:linClrLst>
+    <dgm:effectClrLst/>
+    <dgm:txLinClrLst/>
+    <dgm:txFillClrLst/>
+    <dgm:txEffectClrLst/>
+  </dgm:styleLbl>
+  <dgm:styleLbl name="sibTrans1D1">
+    <dgm:fillClrLst meth="repeat">
+      <a:schemeClr val="accent1"/>
+    </dgm:fillClrLst>
+    <dgm:linClrLst meth="repeat">
+      <a:schemeClr val="accent1"/>
+    </dgm:linClrLst>
+    <dgm:effectClrLst/>
+    <dgm:txLinClrLst/>
+    <dgm:txFillClrLst meth="repeat">
+      <a:schemeClr val="tx1"/>
+    </dgm:txFillClrLst>
+    <dgm:txEffectClrLst/>
+  </dgm:styleLbl>
+  <dgm:styleLbl name="callout">
+    <dgm:fillClrLst meth="repeat">
+      <a:schemeClr val="accent1"/>
+    </dgm:fillClrLst>
+    <dgm:linClrLst meth="repeat">
+      <a:schemeClr val="accent1">
+        <a:tint val="50000"/>
+      </a:schemeClr>
+    </dgm:linClrLst>
+    <dgm:effectClrLst/>
+    <dgm:txLinClrLst/>
+    <dgm:txFillClrLst meth="repeat">
+      <a:schemeClr val="tx1"/>
+    </dgm:txFillClrLst>
+    <dgm:txEffectClrLst/>
+  </dgm:styleLbl>
+  <dgm:styleLbl name="asst0">
+    <dgm:fillClrLst meth="repeat">
+      <a:schemeClr val="accent1"/>
+    </dgm:fillClrLst>
+    <dgm:linClrLst meth="repeat">
+      <a:schemeClr val="lt1"/>
+    </dgm:linClrLst>
+    <dgm:effectClrLst/>
+    <dgm:txLinClrLst/>
+    <dgm:txFillClrLst/>
+    <dgm:txEffectClrLst/>
+  </dgm:styleLbl>
+  <dgm:styleLbl name="asst1">
+    <dgm:fillClrLst meth="repeat">
+      <a:schemeClr val="accent1"/>
+    </dgm:fillClrLst>
+    <dgm:linClrLst meth="repeat">
+      <a:schemeClr val="lt1"/>
+    </dgm:linClrLst>
+    <dgm:effectClrLst/>
+    <dgm:txLinClrLst/>
+    <dgm:txFillClrLst/>
+    <dgm:txEffectClrLst/>
+  </dgm:styleLbl>
+  <dgm:styleLbl name="asst2">
+    <dgm:fillClrLst meth="repeat">
+      <a:schemeClr val="accent1"/>
+    </dgm:fillClrLst>
+    <dgm:linClrLst meth="repeat">
+      <a:schemeClr val="lt1"/>
+    </dgm:linClrLst>
+    <dgm:effectClrLst/>
+    <dgm:txLinClrLst/>
+    <dgm:txFillClrLst/>
+    <dgm:txEffectClrLst/>
+  </dgm:styleLbl>
+  <dgm:styleLbl name="asst3">
+    <dgm:fillClrLst meth="repeat">
+      <a:schemeClr val="accent1"/>
+    </dgm:fillClrLst>
+    <dgm:linClrLst meth="repeat">
+      <a:schemeClr val="lt1"/>
+    </dgm:linClrLst>
+    <dgm:effectClrLst/>
+    <dgm:txLinClrLst/>
+    <dgm:txFillClrLst/>
+    <dgm:txEffectClrLst/>
+  </dgm:styleLbl>
+  <dgm:styleLbl name="asst4">
+    <dgm:fillClrLst meth="repeat">
+      <a:schemeClr val="accent1"/>
+    </dgm:fillClrLst>
+    <dgm:linClrLst meth="repeat">
+      <a:schemeClr val="lt1"/>
+    </dgm:linClrLst>
+    <dgm:effectClrLst/>
+    <dgm:txLinClrLst/>
+    <dgm:txFillClrLst/>
+    <dgm:txEffectClrLst/>
+  </dgm:styleLbl>
+  <dgm:styleLbl name="parChTrans2D1">
+    <dgm:fillClrLst meth="repeat">
+      <a:schemeClr val="accent1">
+        <a:tint val="60000"/>
+      </a:schemeClr>
+    </dgm:fillClrLst>
+    <dgm:linClrLst meth="repeat">
+      <a:schemeClr val="accent1">
+        <a:tint val="60000"/>
+      </a:schemeClr>
+    </dgm:linClrLst>
+    <dgm:effectClrLst/>
+    <dgm:txLinClrLst/>
+    <dgm:txFillClrLst meth="repeat">
+      <a:schemeClr val="lt1"/>
+    </dgm:txFillClrLst>
+    <dgm:txEffectClrLst/>
+  </dgm:styleLbl>
+  <dgm:styleLbl name="parChTrans2D2">
+    <dgm:fillClrLst meth="repeat">
+      <a:schemeClr val="accent1"/>
+    </dgm:fillClrLst>
+    <dgm:linClrLst meth="repeat">
+      <a:schemeClr val="accent1"/>
+    </dgm:linClrLst>
+    <dgm:effectClrLst/>
+    <dgm:txLinClrLst/>
+    <dgm:txFillClrLst meth="repeat">
+      <a:schemeClr val="lt1"/>
+    </dgm:txFillClrLst>
+    <dgm:txEffectClrLst/>
+  </dgm:styleLbl>
+  <dgm:styleLbl name="parChTrans2D3">
+    <dgm:fillClrLst meth="repeat">
+      <a:schemeClr val="accent1"/>
+    </dgm:fillClrLst>
+    <dgm:linClrLst meth="repeat">
+      <a:schemeClr val="accent1"/>
+    </dgm:linClrLst>
+    <dgm:effectClrLst/>
+    <dgm:txLinClrLst/>
+    <dgm:txFillClrLst meth="repeat">
+      <a:schemeClr val="lt1"/>
+    </dgm:txFillClrLst>
+    <dgm:txEffectClrLst/>
+  </dgm:styleLbl>
+  <dgm:styleLbl name="parChTrans2D4">
+    <dgm:fillClrLst meth="repeat">
+      <a:schemeClr val="accent1"/>
+    </dgm:fillClrLst>
+    <dgm:linClrLst meth="repeat">
+      <a:schemeClr val="accent1"/>
+    </dgm:linClrLst>
+    <dgm:effectClrLst/>
+    <dgm:txLinClrLst/>
+    <dgm:txFillClrLst meth="repeat">
+      <a:schemeClr val="lt1"/>
+    </dgm:txFillClrLst>
+    <dgm:txEffectClrLst/>
+  </dgm:styleLbl>
+  <dgm:styleLbl name="parChTrans1D1">
+    <dgm:fillClrLst meth="repeat">
+      <a:schemeClr val="accent1"/>
+    </dgm:fillClrLst>
+    <dgm:linClrLst meth="repeat">
+      <a:schemeClr val="accent1">
+        <a:shade val="60000"/>
+      </a:schemeClr>
+    </dgm:linClrLst>
+    <dgm:effectClrLst/>
+    <dgm:txLinClrLst/>
+    <dgm:txFillClrLst meth="repeat">
+      <a:schemeClr val="tx1"/>
+    </dgm:txFillClrLst>
+    <dgm:txEffectClrLst/>
+  </dgm:styleLbl>
+  <dgm:styleLbl name="parChTrans1D2">
+    <dgm:fillClrLst meth="repeat">
+      <a:schemeClr val="accent1"/>
+    </dgm:fillClrLst>
+    <dgm:linClrLst meth="repeat">
+      <a:schemeClr val="accent1">
+        <a:shade val="60000"/>
+      </a:schemeClr>
+    </dgm:linClrLst>
+    <dgm:effectClrLst/>
+    <dgm:txLinClrLst/>
+    <dgm:txFillClrLst meth="repeat">
+      <a:schemeClr val="tx1"/>
+    </dgm:txFillClrLst>
+    <dgm:txEffectClrLst/>
+  </dgm:styleLbl>
+  <dgm:styleLbl name="parChTrans1D3">
+    <dgm:fillClrLst meth="repeat">
+      <a:schemeClr val="accent1"/>
+    </dgm:fillClrLst>
+    <dgm:linClrLst meth="repeat">
+      <a:schemeClr val="accent1">
+        <a:shade val="80000"/>
+      </a:schemeClr>
+    </dgm:linClrLst>
+    <dgm:effectClrLst/>
+    <dgm:txLinClrLst/>
+    <dgm:txFillClrLst meth="repeat">
+      <a:schemeClr val="tx1"/>
+    </dgm:txFillClrLst>
+    <dgm:txEffectClrLst/>
+  </dgm:styleLbl>
+  <dgm:styleLbl name="parChTrans1D4">
+    <dgm:fillClrLst meth="repeat">
+      <a:schemeClr val="accent1"/>
+    </dgm:fillClrLst>
+    <dgm:linClrLst meth="repeat">
+      <a:schemeClr val="accent1">
+        <a:shade val="80000"/>
+      </a:schemeClr>
+    </dgm:linClrLst>
+    <dgm:effectClrLst/>
+    <dgm:txLinClrLst/>
+    <dgm:txFillClrLst meth="repeat">
+      <a:schemeClr val="tx1"/>
+    </dgm:txFillClrLst>
+    <dgm:txEffectClrLst/>
+  </dgm:styleLbl>
+  <dgm:styleLbl name="fgAcc1">
+    <dgm:fillClrLst meth="repeat">
+      <a:schemeClr val="lt1">
+        <a:alpha val="90000"/>
+      </a:schemeClr>
+    </dgm:fillClrLst>
+    <dgm:linClrLst meth="repeat">
+      <a:schemeClr val="accent1"/>
+    </dgm:linClrLst>
+    <dgm:effectClrLst/>
+    <dgm:txLinClrLst/>
+    <dgm:txFillClrLst meth="repeat">
+      <a:schemeClr val="dk1"/>
+    </dgm:txFillClrLst>
+    <dgm:txEffectClrLst/>
+  </dgm:styleLbl>
+  <dgm:styleLbl name="conFgAcc1">
+    <dgm:fillClrLst meth="repeat">
+      <a:schemeClr val="lt1">
+        <a:alpha val="90000"/>
+      </a:schemeClr>
+    </dgm:fillClrLst>
+    <dgm:linClrLst meth="repeat">
+      <a:schemeClr val="accent1"/>
+    </dgm:linClrLst>
+    <dgm:effectClrLst/>
+    <dgm:txLinClrLst/>
+    <dgm:txFillClrLst meth="repeat">
+      <a:schemeClr val="dk1"/>
+    </dgm:txFillClrLst>
+    <dgm:txEffectClrLst/>
+  </dgm:styleLbl>
+  <dgm:styleLbl name="alignAcc1">
+    <dgm:fillClrLst meth="repeat">
+      <a:schemeClr val="lt1">
+        <a:alpha val="90000"/>
+      </a:schemeClr>
+    </dgm:fillClrLst>
+    <dgm:linClrLst meth="repeat">
+      <a:schemeClr val="accent1"/>
+    </dgm:linClrLst>
+    <dgm:effectClrLst/>
+    <dgm:txLinClrLst/>
+    <dgm:txFillClrLst meth="repeat">
+      <a:schemeClr val="dk1"/>
+    </dgm:txFillClrLst>
+    <dgm:txEffectClrLst/>
+  </dgm:styleLbl>
+  <dgm:styleLbl name="trAlignAcc1">
+    <dgm:fillClrLst meth="repeat">
+      <a:schemeClr val="lt1">
+        <a:alpha val="40000"/>
+      </a:schemeClr>
+    </dgm:fillClrLst>
+    <dgm:linClrLst meth="repeat">
+      <a:schemeClr val="accent1"/>
+    </dgm:linClrLst>
+    <dgm:effectClrLst/>
+    <dgm:txLinClrLst/>
+    <dgm:txFillClrLst meth="repeat">
+      <a:schemeClr val="dk1"/>
+    </dgm:txFillClrLst>
+    <dgm:txEffectClrLst/>
+  </dgm:styleLbl>
+  <dgm:styleLbl name="bgAcc1">
+    <dgm:fillClrLst meth="repeat">
+      <a:schemeClr val="lt1">
+        <a:alpha val="90000"/>
+      </a:schemeClr>
+    </dgm:fillClrLst>
+    <dgm:linClrLst meth="repeat">
+      <a:schemeClr val="accent1"/>
+    </dgm:linClrLst>
+    <dgm:effectClrLst/>
+    <dgm:txLinClrLst/>
+    <dgm:txFillClrLst meth="repeat">
+      <a:schemeClr val="dk1"/>
+    </dgm:txFillClrLst>
+    <dgm:txEffectClrLst/>
+  </dgm:styleLbl>
+  <dgm:styleLbl name="solidFgAcc1">
+    <dgm:fillClrLst meth="repeat">
+      <a:schemeClr val="lt1"/>
+    </dgm:fillClrLst>
+    <dgm:linClrLst meth="repeat">
+      <a:schemeClr val="accent1"/>
+    </dgm:linClrLst>
+    <dgm:effectClrLst/>
+    <dgm:txLinClrLst/>
+    <dgm:txFillClrLst meth="repeat">
+      <a:schemeClr val="dk1"/>
+    </dgm:txFillClrLst>
+    <dgm:txEffectClrLst/>
+  </dgm:styleLbl>
+  <dgm:styleLbl name="solidAlignAcc1">
+    <dgm:fillClrLst meth="repeat">
+      <a:schemeClr val="lt1"/>
+    </dgm:fillClrLst>
+    <dgm:linClrLst meth="repeat">
+      <a:schemeClr val="accent1"/>
+    </dgm:linClrLst>
+    <dgm:effectClrLst/>
+    <dgm:txLinClrLst/>
+    <dgm:txFillClrLst meth="repeat">
+      <a:schemeClr val="dk1"/>
+    </dgm:txFillClrLst>
+    <dgm:txEffectClrLst/>
+  </dgm:styleLbl>
+  <dgm:styleLbl name="solidBgAcc1">
+    <dgm:fillClrLst meth="repeat">
+      <a:schemeClr val="lt1"/>
+    </dgm:fillClrLst>
+    <dgm:linClrLst meth="repeat">
+      <a:schemeClr val="accent1"/>
+    </dgm:linClrLst>
+    <dgm:effectClrLst/>
+    <dgm:txLinClrLst/>
+    <dgm:txFillClrLst meth="repeat">
+      <a:schemeClr val="dk1"/>
+    </dgm:txFillClrLst>
+    <dgm:txEffectClrLst/>
+  </dgm:styleLbl>
+  <dgm:styleLbl name="fgAccFollowNode1">
+    <dgm:fillClrLst meth="repeat">
+      <a:schemeClr val="accent1">
+        <a:alpha val="90000"/>
+        <a:tint val="40000"/>
+      </a:schemeClr>
+    </dgm:fillClrLst>
+    <dgm:linClrLst meth="repeat">
+      <a:schemeClr val="accent1">
+        <a:alpha val="90000"/>
+        <a:tint val="40000"/>
+      </a:schemeClr>
+    </dgm:linClrLst>
+    <dgm:effectClrLst/>
+    <dgm:txLinClrLst/>
+    <dgm:txFillClrLst meth="repeat">
+      <a:schemeClr val="dk1"/>
+    </dgm:txFillClrLst>
+    <dgm:txEffectClrLst/>
+  </dgm:styleLbl>
+  <dgm:styleLbl name="alignAccFollowNode1">
+    <dgm:fillClrLst meth="repeat">
+      <a:schemeClr val="accent1">
+        <a:alpha val="90000"/>
+        <a:tint val="40000"/>
+      </a:schemeClr>
+    </dgm:fillClrLst>
+    <dgm:linClrLst meth="repeat">
+      <a:schemeClr val="accent1">
+        <a:alpha val="90000"/>
+        <a:tint val="40000"/>
+      </a:schemeClr>
+    </dgm:linClrLst>
+    <dgm:effectClrLst/>
+    <dgm:txLinClrLst/>
+    <dgm:txFillClrLst meth="repeat">
+      <a:schemeClr val="dk1"/>
+    </dgm:txFillClrLst>
+    <dgm:txEffectClrLst/>
+  </dgm:styleLbl>
+  <dgm:styleLbl name="bgAccFollowNode1">
+    <dgm:fillClrLst meth="repeat">
+      <a:schemeClr val="accent1">
+        <a:alpha val="90000"/>
+        <a:tint val="40000"/>
+      </a:schemeClr>
+    </dgm:fillClrLst>
+    <dgm:linClrLst meth="repeat">
+      <a:schemeClr val="accent1">
+        <a:alpha val="90000"/>
+        <a:tint val="40000"/>
+      </a:schemeClr>
+    </dgm:linClrLst>
+    <dgm:effectClrLst/>
+    <dgm:txLinClrLst/>
+    <dgm:txFillClrLst meth="repeat">
+      <a:schemeClr val="dk1"/>
+    </dgm:txFillClrLst>
+    <dgm:txEffectClrLst/>
+  </dgm:styleLbl>
+  <dgm:styleLbl name="fgAcc0">
+    <dgm:fillClrLst meth="repeat">
+      <a:schemeClr val="lt1">
+        <a:alpha val="90000"/>
+      </a:schemeClr>
+    </dgm:fillClrLst>
+    <dgm:linClrLst meth="repeat">
+      <a:schemeClr val="accent1"/>
+    </dgm:linClrLst>
+    <dgm:effectClrLst/>
+    <dgm:txLinClrLst/>
+    <dgm:txFillClrLst meth="repeat">
+      <a:schemeClr val="dk1"/>
+    </dgm:txFillClrLst>
+    <dgm:txEffectClrLst/>
+  </dgm:styleLbl>
+  <dgm:styleLbl name="fgAcc2">
+    <dgm:fillClrLst meth="repeat">
+      <a:schemeClr val="lt1">
+        <a:alpha val="90000"/>
+      </a:schemeClr>
+    </dgm:fillClrLst>
+    <dgm:linClrLst meth="repeat">
+      <a:schemeClr val="accent1"/>
+    </dgm:linClrLst>
+    <dgm:effectClrLst/>
+    <dgm:txLinClrLst/>
+    <dgm:txFillClrLst meth="repeat">
+      <a:schemeClr val="dk1"/>
+    </dgm:txFillClrLst>
+    <dgm:txEffectClrLst/>
+  </dgm:styleLbl>
+  <dgm:styleLbl name="fgAcc3">
+    <dgm:fillClrLst meth="repeat">
+      <a:schemeClr val="lt1">
+        <a:alpha val="90000"/>
+      </a:schemeClr>
+    </dgm:fillClrLst>
+    <dgm:linClrLst meth="repeat">
+      <a:schemeClr val="accent1"/>
+    </dgm:linClrLst>
+    <dgm:effectClrLst/>
+    <dgm:txLinClrLst/>
+    <dgm:txFillClrLst meth="repeat">
+      <a:schemeClr val="dk1"/>
+    </dgm:txFillClrLst>
+    <dgm:txEffectClrLst/>
+  </dgm:styleLbl>
+  <dgm:styleLbl name="fgAcc4">
+    <dgm:fillClrLst meth="repeat">
+      <a:schemeClr val="lt1">
+        <a:alpha val="90000"/>
+      </a:schemeClr>
+    </dgm:fillClrLst>
+    <dgm:linClrLst meth="repeat">
+      <a:schemeClr val="accent1"/>
+    </dgm:linClrLst>
+    <dgm:effectClrLst/>
+    <dgm:txLinClrLst/>
+    <dgm:txFillClrLst meth="repeat">
+      <a:schemeClr val="dk1"/>
+    </dgm:txFillClrLst>
+    <dgm:txEffectClrLst/>
+  </dgm:styleLbl>
+  <dgm:styleLbl name="bgShp">
+    <dgm:fillClrLst meth="repeat">
+      <a:schemeClr val="accent1">
+        <a:tint val="40000"/>
+      </a:schemeClr>
+    </dgm:fillClrLst>
+    <dgm:linClrLst meth="repeat">
+      <a:schemeClr val="accent1"/>
+    </dgm:linClrLst>
+    <dgm:effectClrLst/>
+    <dgm:txLinClrLst/>
+    <dgm:txFillClrLst meth="repeat">
+      <a:schemeClr val="dk1"/>
+    </dgm:txFillClrLst>
+    <dgm:txEffectClrLst/>
+  </dgm:styleLbl>
+  <dgm:styleLbl name="dkBgShp">
+    <dgm:fillClrLst meth="repeat">
+      <a:schemeClr val="accent1">
+        <a:shade val="80000"/>
+      </a:schemeClr>
+    </dgm:fillClrLst>
+    <dgm:linClrLst meth="repeat">
+      <a:schemeClr val="accent1"/>
+    </dgm:linClrLst>
+    <dgm:effectClrLst/>
+    <dgm:txLinClrLst/>
+    <dgm:txFillClrLst meth="repeat">
+      <a:schemeClr val="lt1"/>
+    </dgm:txFillClrLst>
+    <dgm:txEffectClrLst/>
+  </dgm:styleLbl>
+  <dgm:styleLbl name="trBgShp">
+    <dgm:fillClrLst meth="repeat">
+      <a:schemeClr val="accent1">
+        <a:tint val="50000"/>
+        <a:alpha val="40000"/>
+      </a:schemeClr>
+    </dgm:fillClrLst>
+    <dgm:linClrLst meth="repeat">
+      <a:schemeClr val="accent1"/>
+    </dgm:linClrLst>
+    <dgm:effectClrLst/>
+    <dgm:txLinClrLst/>
+    <dgm:txFillClrLst meth="repeat">
+      <a:schemeClr val="lt1"/>
+    </dgm:txFillClrLst>
+    <dgm:txEffectClrLst/>
+  </dgm:styleLbl>
+  <dgm:styleLbl name="fgShp">
+    <dgm:fillClrLst meth="repeat">
+      <a:schemeClr val="accent1">
+        <a:tint val="60000"/>
+      </a:schemeClr>
+    </dgm:fillClrLst>
+    <dgm:linClrLst meth="repeat">
+      <a:schemeClr val="lt1"/>
+    </dgm:linClrLst>
+    <dgm:effectClrLst/>
+    <dgm:txLinClrLst/>
+    <dgm:txFillClrLst meth="repeat">
+      <a:schemeClr val="dk1"/>
+    </dgm:txFillClrLst>
+    <dgm:txEffectClrLst/>
+  </dgm:styleLbl>
+  <dgm:styleLbl name="revTx">
+    <dgm:fillClrLst meth="repeat">
+      <a:schemeClr val="lt1">
+        <a:alpha val="0"/>
+      </a:schemeClr>
+    </dgm:fillClrLst>
+    <dgm:linClrLst meth="repeat">
+      <a:schemeClr val="dk1">
+        <a:alpha val="0"/>
+      </a:schemeClr>
+    </dgm:linClrLst>
+    <dgm:effectClrLst/>
+    <dgm:txLinClrLst/>
+    <dgm:txFillClrLst meth="repeat">
+      <a:schemeClr val="tx1"/>
+    </dgm:txFillClrLst>
+    <dgm:txEffectClrLst/>
+  </dgm:styleLbl>
+</dgm:colorsDef>
+</file>
+
 <file path=ppt/diagrams/data1.xml><?xml version="1.0" encoding="utf-8"?>
 <dgm:dataModel xmlns:dgm="http://schemas.openxmlformats.org/drawingml/2006/diagram" xmlns:a="http://schemas.openxmlformats.org/drawingml/2006/main">
   <dgm:ptLst>
@@ -4809,8 +5557,8 @@
         </a:p>
       </dgm:t>
     </dgm:pt>
-    <mc:AlternateContent xmlns:mc="http://schemas.openxmlformats.org/markup-compatibility/2006">
-      <mc:Choice xmlns:a14="http://schemas.microsoft.com/office/drawing/2010/main" Requires="a14">
+    <mc:AlternateContent xmlns:mc="http://schemas.openxmlformats.org/markup-compatibility/2006" xmlns:a14="http://schemas.microsoft.com/office/drawing/2010/main">
+      <mc:Choice Requires="a14">
         <dgm:pt modelId="{BA3EA654-56A9-489E-84D1-3C55E044E2BE}">
           <dgm:prSet custT="1"/>
           <dgm:spPr/>
@@ -5039,7 +5787,7 @@
           </dgm:t>
         </dgm:pt>
       </mc:Choice>
-      <mc:Fallback>
+      <mc:Fallback xmlns="">
         <dgm:pt modelId="{BA3EA654-56A9-489E-84D1-3C55E044E2BE}">
           <dgm:prSet custT="1"/>
           <dgm:spPr/>
@@ -5145,8 +5893,8 @@
         </a:p>
       </dgm:t>
     </dgm:pt>
-    <mc:AlternateContent xmlns:mc="http://schemas.openxmlformats.org/markup-compatibility/2006">
-      <mc:Choice xmlns:a14="http://schemas.microsoft.com/office/drawing/2010/main" Requires="a14">
+    <mc:AlternateContent xmlns:mc="http://schemas.openxmlformats.org/markup-compatibility/2006" xmlns:a14="http://schemas.microsoft.com/office/drawing/2010/main">
+      <mc:Choice Requires="a14">
         <dgm:pt modelId="{6EB72FF8-7921-411F-87CC-DFFA0A2447FF}">
           <dgm:prSet custT="1"/>
           <dgm:spPr/>
@@ -5528,7 +6276,7 @@
           </dgm:t>
         </dgm:pt>
       </mc:Choice>
-      <mc:Fallback>
+      <mc:Fallback xmlns="">
         <dgm:pt modelId="{6EB72FF8-7921-411F-87CC-DFFA0A2447FF}">
           <dgm:prSet custT="1"/>
           <dgm:spPr/>
@@ -6326,8 +7074,8 @@
         </a:p>
       </dgm:t>
     </dgm:pt>
-    <mc:AlternateContent xmlns:mc="http://schemas.openxmlformats.org/markup-compatibility/2006">
-      <mc:Choice xmlns:a14="http://schemas.microsoft.com/office/drawing/2010/main" Requires="a14">
+    <mc:AlternateContent xmlns:mc="http://schemas.openxmlformats.org/markup-compatibility/2006" xmlns:a14="http://schemas.microsoft.com/office/drawing/2010/main">
+      <mc:Choice Requires="a14">
         <dgm:pt modelId="{EEBE3717-EEAA-48BE-9FCB-FB99FB6A494A}">
           <dgm:prSet custT="1"/>
           <dgm:spPr/>
@@ -6664,7 +7412,7 @@
           </dgm:t>
         </dgm:pt>
       </mc:Choice>
-      <mc:Fallback>
+      <mc:Fallback xmlns="">
         <dgm:pt modelId="{EEBE3717-EEAA-48BE-9FCB-FB99FB6A494A}">
           <dgm:prSet custT="1"/>
           <dgm:spPr/>
@@ -10211,8 +10959,8 @@
         </a:p>
       </dgm:t>
     </dgm:pt>
-    <mc:AlternateContent xmlns:mc="http://schemas.openxmlformats.org/markup-compatibility/2006">
-      <mc:Choice xmlns:a14="http://schemas.microsoft.com/office/drawing/2010/main" Requires="a14">
+    <mc:AlternateContent xmlns:mc="http://schemas.openxmlformats.org/markup-compatibility/2006" xmlns:a14="http://schemas.microsoft.com/office/drawing/2010/main">
+      <mc:Choice Requires="a14">
         <dgm:pt modelId="{2DA98798-1DD2-4EC8-B48E-5C1C939B7E20}">
           <dgm:prSet custT="1"/>
           <dgm:spPr/>
@@ -10434,7 +11182,7 @@
           </dgm:t>
         </dgm:pt>
       </mc:Choice>
-      <mc:Fallback>
+      <mc:Fallback xmlns="">
         <dgm:pt modelId="{2DA98798-1DD2-4EC8-B48E-5C1C939B7E20}">
           <dgm:prSet custT="1"/>
           <dgm:spPr/>
@@ -10879,8 +11627,8 @@
         </a:p>
       </dgm:t>
     </dgm:pt>
-    <mc:AlternateContent xmlns:mc="http://schemas.openxmlformats.org/markup-compatibility/2006">
-      <mc:Choice xmlns:a14="http://schemas.microsoft.com/office/drawing/2010/main" Requires="a14">
+    <mc:AlternateContent xmlns:mc="http://schemas.openxmlformats.org/markup-compatibility/2006" xmlns:a14="http://schemas.microsoft.com/office/drawing/2010/main">
+      <mc:Choice Requires="a14">
         <dgm:pt modelId="{DD38F857-2EC9-4B95-9B92-904BF18FB1AB}">
           <dgm:prSet custT="1"/>
           <dgm:spPr/>
@@ -11289,17 +12037,7 @@
                           <a:latin typeface="Cambria Math" panose="02040503050406030204" pitchFamily="18" charset="0"/>
                           <a:cs typeface="Latin Modern Math" panose="020B0604020202020204" pitchFamily="34" charset="0"/>
                         </a:rPr>
-                        <m:t>2</m:t>
-                      </m:r>
-                      <m:r>
-                        <a:rPr lang="en-US" altLang="ja-JP" sz="4000" b="0" i="1" smtClean="0">
-                          <a:solidFill>
-                            <a:schemeClr val="tx1"/>
-                          </a:solidFill>
-                          <a:latin typeface="Cambria Math" panose="02040503050406030204" pitchFamily="18" charset="0"/>
-                          <a:cs typeface="Latin Modern Math" panose="020B0604020202020204" pitchFamily="34" charset="0"/>
-                        </a:rPr>
-                        <m:t>×10</m:t>
+                        <m:t>2×10</m:t>
                       </m:r>
                     </m:e>
                     <m:sup>
@@ -11361,7 +12099,7 @@
           </dgm:t>
         </dgm:pt>
       </mc:Choice>
-      <mc:Fallback>
+      <mc:Fallback xmlns="">
         <dgm:pt modelId="{DD38F857-2EC9-4B95-9B92-904BF18FB1AB}">
           <dgm:prSet custT="1"/>
           <dgm:spPr/>
@@ -19641,17 +20379,7 @@
                       <a:latin typeface="Cambria Math" panose="02040503050406030204" pitchFamily="18" charset="0"/>
                       <a:cs typeface="Latin Modern Math" panose="020B0604020202020204" pitchFamily="34" charset="0"/>
                     </a:rPr>
-                    <m:t>2</m:t>
-                  </m:r>
-                  <m:r>
-                    <a:rPr lang="en-US" altLang="ja-JP" sz="4000" b="0" i="1" kern="1200" smtClean="0">
-                      <a:solidFill>
-                        <a:schemeClr val="tx1"/>
-                      </a:solidFill>
-                      <a:latin typeface="Cambria Math" panose="02040503050406030204" pitchFamily="18" charset="0"/>
-                      <a:cs typeface="Latin Modern Math" panose="020B0604020202020204" pitchFamily="34" charset="0"/>
-                    </a:rPr>
-                    <m:t>×10</m:t>
+                    <m:t>2×10</m:t>
                   </m:r>
                 </m:e>
                 <m:sup>
@@ -20925,6 +21653,173 @@
 </dgm:layoutDef>
 </file>
 
+<file path=ppt/diagrams/layout20.xml><?xml version="1.0" encoding="utf-8"?>
+<dgm:layoutDef xmlns:dgm="http://schemas.openxmlformats.org/drawingml/2006/diagram" xmlns:a="http://schemas.openxmlformats.org/drawingml/2006/main" uniqueId="urn:microsoft.com/office/officeart/2005/8/layout/vList2">
+  <dgm:title val=""/>
+  <dgm:desc val=""/>
+  <dgm:catLst>
+    <dgm:cat type="list" pri="3000"/>
+    <dgm:cat type="convert" pri="1000"/>
+  </dgm:catLst>
+  <dgm:sampData>
+    <dgm:dataModel>
+      <dgm:ptLst>
+        <dgm:pt modelId="0" type="doc"/>
+        <dgm:pt modelId="1">
+          <dgm:prSet phldr="1"/>
+        </dgm:pt>
+        <dgm:pt modelId="11">
+          <dgm:prSet phldr="1"/>
+        </dgm:pt>
+        <dgm:pt modelId="2">
+          <dgm:prSet phldr="1"/>
+        </dgm:pt>
+        <dgm:pt modelId="21">
+          <dgm:prSet phldr="1"/>
+        </dgm:pt>
+      </dgm:ptLst>
+      <dgm:cxnLst>
+        <dgm:cxn modelId="4" srcId="0" destId="1" srcOrd="0" destOrd="0"/>
+        <dgm:cxn modelId="5" srcId="0" destId="2" srcOrd="1" destOrd="0"/>
+        <dgm:cxn modelId="12" srcId="1" destId="11" srcOrd="0" destOrd="0"/>
+        <dgm:cxn modelId="23" srcId="2" destId="21" srcOrd="0" destOrd="0"/>
+      </dgm:cxnLst>
+      <dgm:bg/>
+      <dgm:whole/>
+    </dgm:dataModel>
+  </dgm:sampData>
+  <dgm:styleData>
+    <dgm:dataModel>
+      <dgm:ptLst>
+        <dgm:pt modelId="0" type="doc"/>
+        <dgm:pt modelId="1"/>
+        <dgm:pt modelId="2"/>
+      </dgm:ptLst>
+      <dgm:cxnLst>
+        <dgm:cxn modelId="3" srcId="0" destId="1" srcOrd="0" destOrd="0"/>
+        <dgm:cxn modelId="4" srcId="0" destId="2" srcOrd="1" destOrd="0"/>
+      </dgm:cxnLst>
+      <dgm:bg/>
+      <dgm:whole/>
+    </dgm:dataModel>
+  </dgm:styleData>
+  <dgm:clrData>
+    <dgm:dataModel>
+      <dgm:ptLst>
+        <dgm:pt modelId="0" type="doc"/>
+        <dgm:pt modelId="1"/>
+        <dgm:pt modelId="2"/>
+        <dgm:pt modelId="3"/>
+        <dgm:pt modelId="4"/>
+      </dgm:ptLst>
+      <dgm:cxnLst>
+        <dgm:cxn modelId="5" srcId="0" destId="1" srcOrd="0" destOrd="0"/>
+        <dgm:cxn modelId="6" srcId="0" destId="2" srcOrd="1" destOrd="0"/>
+        <dgm:cxn modelId="7" srcId="0" destId="3" srcOrd="2" destOrd="0"/>
+        <dgm:cxn modelId="8" srcId="0" destId="4" srcOrd="3" destOrd="0"/>
+      </dgm:cxnLst>
+      <dgm:bg/>
+      <dgm:whole/>
+    </dgm:dataModel>
+  </dgm:clrData>
+  <dgm:layoutNode name="linear">
+    <dgm:varLst>
+      <dgm:animLvl val="lvl"/>
+      <dgm:resizeHandles val="exact"/>
+    </dgm:varLst>
+    <dgm:alg type="lin">
+      <dgm:param type="linDir" val="fromT"/>
+      <dgm:param type="vertAlign" val="mid"/>
+    </dgm:alg>
+    <dgm:shape xmlns:r="http://schemas.openxmlformats.org/officeDocument/2006/relationships" r:blip="">
+      <dgm:adjLst/>
+    </dgm:shape>
+    <dgm:presOf/>
+    <dgm:constrLst>
+      <dgm:constr type="w" for="ch" forName="parentText" refType="w"/>
+      <dgm:constr type="h" for="ch" forName="parentText" refType="primFontSz" refFor="ch" refForName="parentText" fact="0.52"/>
+      <dgm:constr type="w" for="ch" forName="childText" refType="w"/>
+      <dgm:constr type="h" for="ch" forName="childText" refType="primFontSz" refFor="ch" refForName="parentText" fact="0.46"/>
+      <dgm:constr type="h" for="ch" forName="parentText" op="equ"/>
+      <dgm:constr type="primFontSz" for="ch" forName="parentText" op="equ" val="65"/>
+      <dgm:constr type="primFontSz" for="ch" forName="childText" refType="primFontSz" refFor="ch" refForName="parentText" op="equ"/>
+      <dgm:constr type="h" for="ch" forName="spacer" refType="primFontSz" refFor="ch" refForName="parentText" fact="0.08"/>
+    </dgm:constrLst>
+    <dgm:ruleLst>
+      <dgm:rule type="primFontSz" for="ch" forName="parentText" val="5" fact="NaN" max="NaN"/>
+    </dgm:ruleLst>
+    <dgm:forEach name="Name0" axis="ch" ptType="node">
+      <dgm:layoutNode name="parentText" styleLbl="node1">
+        <dgm:varLst>
+          <dgm:chMax val="0"/>
+          <dgm:bulletEnabled val="1"/>
+        </dgm:varLst>
+        <dgm:alg type="tx">
+          <dgm:param type="parTxLTRAlign" val="l"/>
+          <dgm:param type="parTxRTLAlign" val="r"/>
+        </dgm:alg>
+        <dgm:shape xmlns:r="http://schemas.openxmlformats.org/officeDocument/2006/relationships" type="roundRect" r:blip="">
+          <dgm:adjLst/>
+        </dgm:shape>
+        <dgm:presOf axis="self"/>
+        <dgm:constrLst>
+          <dgm:constr type="tMarg" refType="primFontSz" fact="0.3"/>
+          <dgm:constr type="bMarg" refType="primFontSz" fact="0.3"/>
+          <dgm:constr type="lMarg" refType="primFontSz" fact="0.3"/>
+          <dgm:constr type="rMarg" refType="primFontSz" fact="0.3"/>
+        </dgm:constrLst>
+        <dgm:ruleLst>
+          <dgm:rule type="h" val="INF" fact="NaN" max="NaN"/>
+        </dgm:ruleLst>
+      </dgm:layoutNode>
+      <dgm:choose name="Name1">
+        <dgm:if name="Name2" axis="ch" ptType="node" func="cnt" op="gte" val="1">
+          <dgm:layoutNode name="childText" styleLbl="revTx">
+            <dgm:varLst>
+              <dgm:bulletEnabled val="1"/>
+            </dgm:varLst>
+            <dgm:alg type="tx">
+              <dgm:param type="stBulletLvl" val="1"/>
+              <dgm:param type="lnSpAfChP" val="20"/>
+            </dgm:alg>
+            <dgm:shape xmlns:r="http://schemas.openxmlformats.org/officeDocument/2006/relationships" type="rect" r:blip="">
+              <dgm:adjLst/>
+            </dgm:shape>
+            <dgm:presOf axis="des" ptType="node"/>
+            <dgm:constrLst>
+              <dgm:constr type="tMarg" refType="primFontSz" fact="0.1"/>
+              <dgm:constr type="bMarg" refType="primFontSz" fact="0.1"/>
+              <dgm:constr type="lMarg" refType="w" fact="0.09"/>
+            </dgm:constrLst>
+            <dgm:ruleLst>
+              <dgm:rule type="h" val="INF" fact="NaN" max="NaN"/>
+            </dgm:ruleLst>
+          </dgm:layoutNode>
+        </dgm:if>
+        <dgm:else name="Name3">
+          <dgm:choose name="Name4">
+            <dgm:if name="Name5" axis="par ch" ptType="doc node" func="cnt" op="gte" val="2">
+              <dgm:forEach name="Name6" axis="followSib" ptType="sibTrans" cnt="1">
+                <dgm:layoutNode name="spacer">
+                  <dgm:alg type="sp"/>
+                  <dgm:shape xmlns:r="http://schemas.openxmlformats.org/officeDocument/2006/relationships" r:blip="">
+                    <dgm:adjLst/>
+                  </dgm:shape>
+                  <dgm:presOf/>
+                  <dgm:constrLst/>
+                  <dgm:ruleLst/>
+                </dgm:layoutNode>
+              </dgm:forEach>
+            </dgm:if>
+            <dgm:else name="Name7"/>
+          </dgm:choose>
+        </dgm:else>
+      </dgm:choose>
+    </dgm:forEach>
+  </dgm:layoutNode>
+</dgm:layoutDef>
+</file>
+
 <file path=ppt/diagrams/quickStyle1.xml><?xml version="1.0" encoding="utf-8"?>
 <dgm:styleDef xmlns:dgm="http://schemas.openxmlformats.org/drawingml/2006/diagram" xmlns:a="http://schemas.openxmlformats.org/drawingml/2006/main" uniqueId="urn:microsoft.com/office/officeart/2005/8/quickstyle/simple1">
   <dgm:title val=""/>
@@ -21960,6 +22855,1040 @@
 </file>
 
 <file path=ppt/diagrams/quickStyle2.xml><?xml version="1.0" encoding="utf-8"?>
+<dgm:styleDef xmlns:dgm="http://schemas.openxmlformats.org/drawingml/2006/diagram" xmlns:a="http://schemas.openxmlformats.org/drawingml/2006/main" uniqueId="urn:microsoft.com/office/officeart/2005/8/quickstyle/simple1">
+  <dgm:title val=""/>
+  <dgm:desc val=""/>
+  <dgm:catLst>
+    <dgm:cat type="simple" pri="10100"/>
+  </dgm:catLst>
+  <dgm:scene3d>
+    <a:camera prst="orthographicFront"/>
+    <a:lightRig rig="threePt" dir="t"/>
+  </dgm:scene3d>
+  <dgm:styleLbl name="node0">
+    <dgm:scene3d>
+      <a:camera prst="orthographicFront"/>
+      <a:lightRig rig="threePt" dir="t"/>
+    </dgm:scene3d>
+    <dgm:sp3d/>
+    <dgm:txPr/>
+    <dgm:style>
+      <a:lnRef idx="2">
+        <a:scrgbClr r="0" g="0" b="0"/>
+      </a:lnRef>
+      <a:fillRef idx="1">
+        <a:scrgbClr r="0" g="0" b="0"/>
+      </a:fillRef>
+      <a:effectRef idx="0">
+        <a:scrgbClr r="0" g="0" b="0"/>
+      </a:effectRef>
+      <a:fontRef idx="minor">
+        <a:schemeClr val="lt1"/>
+      </a:fontRef>
+    </dgm:style>
+  </dgm:styleLbl>
+  <dgm:styleLbl name="lnNode1">
+    <dgm:scene3d>
+      <a:camera prst="orthographicFront"/>
+      <a:lightRig rig="threePt" dir="t"/>
+    </dgm:scene3d>
+    <dgm:sp3d/>
+    <dgm:txPr/>
+    <dgm:style>
+      <a:lnRef idx="2">
+        <a:scrgbClr r="0" g="0" b="0"/>
+      </a:lnRef>
+      <a:fillRef idx="1">
+        <a:scrgbClr r="0" g="0" b="0"/>
+      </a:fillRef>
+      <a:effectRef idx="0">
+        <a:scrgbClr r="0" g="0" b="0"/>
+      </a:effectRef>
+      <a:fontRef idx="minor">
+        <a:schemeClr val="lt1"/>
+      </a:fontRef>
+    </dgm:style>
+  </dgm:styleLbl>
+  <dgm:styleLbl name="vennNode1">
+    <dgm:scene3d>
+      <a:camera prst="orthographicFront"/>
+      <a:lightRig rig="threePt" dir="t"/>
+    </dgm:scene3d>
+    <dgm:sp3d/>
+    <dgm:txPr/>
+    <dgm:style>
+      <a:lnRef idx="2">
+        <a:scrgbClr r="0" g="0" b="0"/>
+      </a:lnRef>
+      <a:fillRef idx="1">
+        <a:scrgbClr r="0" g="0" b="0"/>
+      </a:fillRef>
+      <a:effectRef idx="0">
+        <a:scrgbClr r="0" g="0" b="0"/>
+      </a:effectRef>
+      <a:fontRef idx="minor">
+        <a:schemeClr val="tx1"/>
+      </a:fontRef>
+    </dgm:style>
+  </dgm:styleLbl>
+  <dgm:styleLbl name="alignNode1">
+    <dgm:scene3d>
+      <a:camera prst="orthographicFront"/>
+      <a:lightRig rig="threePt" dir="t"/>
+    </dgm:scene3d>
+    <dgm:sp3d/>
+    <dgm:txPr/>
+    <dgm:style>
+      <a:lnRef idx="2">
+        <a:scrgbClr r="0" g="0" b="0"/>
+      </a:lnRef>
+      <a:fillRef idx="1">
+        <a:scrgbClr r="0" g="0" b="0"/>
+      </a:fillRef>
+      <a:effectRef idx="0">
+        <a:scrgbClr r="0" g="0" b="0"/>
+      </a:effectRef>
+      <a:fontRef idx="minor">
+        <a:schemeClr val="lt1"/>
+      </a:fontRef>
+    </dgm:style>
+  </dgm:styleLbl>
+  <dgm:styleLbl name="node1">
+    <dgm:scene3d>
+      <a:camera prst="orthographicFront"/>
+      <a:lightRig rig="threePt" dir="t"/>
+    </dgm:scene3d>
+    <dgm:sp3d/>
+    <dgm:txPr/>
+    <dgm:style>
+      <a:lnRef idx="2">
+        <a:scrgbClr r="0" g="0" b="0"/>
+      </a:lnRef>
+      <a:fillRef idx="1">
+        <a:scrgbClr r="0" g="0" b="0"/>
+      </a:fillRef>
+      <a:effectRef idx="0">
+        <a:scrgbClr r="0" g="0" b="0"/>
+      </a:effectRef>
+      <a:fontRef idx="minor">
+        <a:schemeClr val="lt1"/>
+      </a:fontRef>
+    </dgm:style>
+  </dgm:styleLbl>
+  <dgm:styleLbl name="node2">
+    <dgm:scene3d>
+      <a:camera prst="orthographicFront"/>
+      <a:lightRig rig="threePt" dir="t"/>
+    </dgm:scene3d>
+    <dgm:sp3d/>
+    <dgm:txPr/>
+    <dgm:style>
+      <a:lnRef idx="2">
+        <a:scrgbClr r="0" g="0" b="0"/>
+      </a:lnRef>
+      <a:fillRef idx="1">
+        <a:scrgbClr r="0" g="0" b="0"/>
+      </a:fillRef>
+      <a:effectRef idx="0">
+        <a:scrgbClr r="0" g="0" b="0"/>
+      </a:effectRef>
+      <a:fontRef idx="minor">
+        <a:schemeClr val="lt1"/>
+      </a:fontRef>
+    </dgm:style>
+  </dgm:styleLbl>
+  <dgm:styleLbl name="node3">
+    <dgm:scene3d>
+      <a:camera prst="orthographicFront"/>
+      <a:lightRig rig="threePt" dir="t"/>
+    </dgm:scene3d>
+    <dgm:sp3d/>
+    <dgm:txPr/>
+    <dgm:style>
+      <a:lnRef idx="2">
+        <a:scrgbClr r="0" g="0" b="0"/>
+      </a:lnRef>
+      <a:fillRef idx="1">
+        <a:scrgbClr r="0" g="0" b="0"/>
+      </a:fillRef>
+      <a:effectRef idx="0">
+        <a:scrgbClr r="0" g="0" b="0"/>
+      </a:effectRef>
+      <a:fontRef idx="minor">
+        <a:schemeClr val="lt1"/>
+      </a:fontRef>
+    </dgm:style>
+  </dgm:styleLbl>
+  <dgm:styleLbl name="node4">
+    <dgm:scene3d>
+      <a:camera prst="orthographicFront"/>
+      <a:lightRig rig="threePt" dir="t"/>
+    </dgm:scene3d>
+    <dgm:sp3d/>
+    <dgm:txPr/>
+    <dgm:style>
+      <a:lnRef idx="2">
+        <a:scrgbClr r="0" g="0" b="0"/>
+      </a:lnRef>
+      <a:fillRef idx="1">
+        <a:scrgbClr r="0" g="0" b="0"/>
+      </a:fillRef>
+      <a:effectRef idx="0">
+        <a:scrgbClr r="0" g="0" b="0"/>
+      </a:effectRef>
+      <a:fontRef idx="minor">
+        <a:schemeClr val="lt1"/>
+      </a:fontRef>
+    </dgm:style>
+  </dgm:styleLbl>
+  <dgm:styleLbl name="fgImgPlace1">
+    <dgm:scene3d>
+      <a:camera prst="orthographicFront"/>
+      <a:lightRig rig="threePt" dir="t"/>
+    </dgm:scene3d>
+    <dgm:sp3d/>
+    <dgm:txPr/>
+    <dgm:style>
+      <a:lnRef idx="2">
+        <a:scrgbClr r="0" g="0" b="0"/>
+      </a:lnRef>
+      <a:fillRef idx="1">
+        <a:scrgbClr r="0" g="0" b="0"/>
+      </a:fillRef>
+      <a:effectRef idx="0">
+        <a:scrgbClr r="0" g="0" b="0"/>
+      </a:effectRef>
+      <a:fontRef idx="minor"/>
+    </dgm:style>
+  </dgm:styleLbl>
+  <dgm:styleLbl name="alignImgPlace1">
+    <dgm:scene3d>
+      <a:camera prst="orthographicFront"/>
+      <a:lightRig rig="threePt" dir="t"/>
+    </dgm:scene3d>
+    <dgm:sp3d/>
+    <dgm:txPr/>
+    <dgm:style>
+      <a:lnRef idx="2">
+        <a:scrgbClr r="0" g="0" b="0"/>
+      </a:lnRef>
+      <a:fillRef idx="1">
+        <a:scrgbClr r="0" g="0" b="0"/>
+      </a:fillRef>
+      <a:effectRef idx="0">
+        <a:scrgbClr r="0" g="0" b="0"/>
+      </a:effectRef>
+      <a:fontRef idx="minor"/>
+    </dgm:style>
+  </dgm:styleLbl>
+  <dgm:styleLbl name="bgImgPlace1">
+    <dgm:scene3d>
+      <a:camera prst="orthographicFront"/>
+      <a:lightRig rig="threePt" dir="t"/>
+    </dgm:scene3d>
+    <dgm:sp3d/>
+    <dgm:txPr/>
+    <dgm:style>
+      <a:lnRef idx="2">
+        <a:scrgbClr r="0" g="0" b="0"/>
+      </a:lnRef>
+      <a:fillRef idx="1">
+        <a:scrgbClr r="0" g="0" b="0"/>
+      </a:fillRef>
+      <a:effectRef idx="0">
+        <a:scrgbClr r="0" g="0" b="0"/>
+      </a:effectRef>
+      <a:fontRef idx="minor"/>
+    </dgm:style>
+  </dgm:styleLbl>
+  <dgm:styleLbl name="sibTrans2D1">
+    <dgm:scene3d>
+      <a:camera prst="orthographicFront"/>
+      <a:lightRig rig="threePt" dir="t"/>
+    </dgm:scene3d>
+    <dgm:sp3d/>
+    <dgm:txPr/>
+    <dgm:style>
+      <a:lnRef idx="0">
+        <a:scrgbClr r="0" g="0" b="0"/>
+      </a:lnRef>
+      <a:fillRef idx="1">
+        <a:scrgbClr r="0" g="0" b="0"/>
+      </a:fillRef>
+      <a:effectRef idx="0">
+        <a:scrgbClr r="0" g="0" b="0"/>
+      </a:effectRef>
+      <a:fontRef idx="minor">
+        <a:schemeClr val="lt1"/>
+      </a:fontRef>
+    </dgm:style>
+  </dgm:styleLbl>
+  <dgm:styleLbl name="fgSibTrans2D1">
+    <dgm:scene3d>
+      <a:camera prst="orthographicFront"/>
+      <a:lightRig rig="threePt" dir="t"/>
+    </dgm:scene3d>
+    <dgm:sp3d/>
+    <dgm:txPr/>
+    <dgm:style>
+      <a:lnRef idx="0">
+        <a:scrgbClr r="0" g="0" b="0"/>
+      </a:lnRef>
+      <a:fillRef idx="1">
+        <a:scrgbClr r="0" g="0" b="0"/>
+      </a:fillRef>
+      <a:effectRef idx="0">
+        <a:scrgbClr r="0" g="0" b="0"/>
+      </a:effectRef>
+      <a:fontRef idx="minor">
+        <a:schemeClr val="lt1"/>
+      </a:fontRef>
+    </dgm:style>
+  </dgm:styleLbl>
+  <dgm:styleLbl name="bgSibTrans2D1">
+    <dgm:scene3d>
+      <a:camera prst="orthographicFront"/>
+      <a:lightRig rig="threePt" dir="t"/>
+    </dgm:scene3d>
+    <dgm:sp3d/>
+    <dgm:txPr/>
+    <dgm:style>
+      <a:lnRef idx="0">
+        <a:scrgbClr r="0" g="0" b="0"/>
+      </a:lnRef>
+      <a:fillRef idx="1">
+        <a:scrgbClr r="0" g="0" b="0"/>
+      </a:fillRef>
+      <a:effectRef idx="0">
+        <a:scrgbClr r="0" g="0" b="0"/>
+      </a:effectRef>
+      <a:fontRef idx="minor">
+        <a:schemeClr val="lt1"/>
+      </a:fontRef>
+    </dgm:style>
+  </dgm:styleLbl>
+  <dgm:styleLbl name="sibTrans1D1">
+    <dgm:scene3d>
+      <a:camera prst="orthographicFront"/>
+      <a:lightRig rig="threePt" dir="t"/>
+    </dgm:scene3d>
+    <dgm:sp3d/>
+    <dgm:txPr/>
+    <dgm:style>
+      <a:lnRef idx="1">
+        <a:scrgbClr r="0" g="0" b="0"/>
+      </a:lnRef>
+      <a:fillRef idx="0">
+        <a:scrgbClr r="0" g="0" b="0"/>
+      </a:fillRef>
+      <a:effectRef idx="0">
+        <a:scrgbClr r="0" g="0" b="0"/>
+      </a:effectRef>
+      <a:fontRef idx="minor"/>
+    </dgm:style>
+  </dgm:styleLbl>
+  <dgm:styleLbl name="callout">
+    <dgm:scene3d>
+      <a:camera prst="orthographicFront"/>
+      <a:lightRig rig="threePt" dir="t"/>
+    </dgm:scene3d>
+    <dgm:sp3d/>
+    <dgm:txPr/>
+    <dgm:style>
+      <a:lnRef idx="2">
+        <a:scrgbClr r="0" g="0" b="0"/>
+      </a:lnRef>
+      <a:fillRef idx="1">
+        <a:scrgbClr r="0" g="0" b="0"/>
+      </a:fillRef>
+      <a:effectRef idx="0">
+        <a:scrgbClr r="0" g="0" b="0"/>
+      </a:effectRef>
+      <a:fontRef idx="minor"/>
+    </dgm:style>
+  </dgm:styleLbl>
+  <dgm:styleLbl name="asst0">
+    <dgm:scene3d>
+      <a:camera prst="orthographicFront"/>
+      <a:lightRig rig="threePt" dir="t"/>
+    </dgm:scene3d>
+    <dgm:sp3d/>
+    <dgm:txPr/>
+    <dgm:style>
+      <a:lnRef idx="2">
+        <a:scrgbClr r="0" g="0" b="0"/>
+      </a:lnRef>
+      <a:fillRef idx="1">
+        <a:scrgbClr r="0" g="0" b="0"/>
+      </a:fillRef>
+      <a:effectRef idx="0">
+        <a:scrgbClr r="0" g="0" b="0"/>
+      </a:effectRef>
+      <a:fontRef idx="minor">
+        <a:schemeClr val="lt1"/>
+      </a:fontRef>
+    </dgm:style>
+  </dgm:styleLbl>
+  <dgm:styleLbl name="asst1">
+    <dgm:scene3d>
+      <a:camera prst="orthographicFront"/>
+      <a:lightRig rig="threePt" dir="t"/>
+    </dgm:scene3d>
+    <dgm:sp3d/>
+    <dgm:txPr/>
+    <dgm:style>
+      <a:lnRef idx="2">
+        <a:scrgbClr r="0" g="0" b="0"/>
+      </a:lnRef>
+      <a:fillRef idx="1">
+        <a:scrgbClr r="0" g="0" b="0"/>
+      </a:fillRef>
+      <a:effectRef idx="0">
+        <a:scrgbClr r="0" g="0" b="0"/>
+      </a:effectRef>
+      <a:fontRef idx="minor">
+        <a:schemeClr val="lt1"/>
+      </a:fontRef>
+    </dgm:style>
+  </dgm:styleLbl>
+  <dgm:styleLbl name="asst2">
+    <dgm:scene3d>
+      <a:camera prst="orthographicFront"/>
+      <a:lightRig rig="threePt" dir="t"/>
+    </dgm:scene3d>
+    <dgm:sp3d/>
+    <dgm:txPr/>
+    <dgm:style>
+      <a:lnRef idx="2">
+        <a:scrgbClr r="0" g="0" b="0"/>
+      </a:lnRef>
+      <a:fillRef idx="1">
+        <a:scrgbClr r="0" g="0" b="0"/>
+      </a:fillRef>
+      <a:effectRef idx="0">
+        <a:scrgbClr r="0" g="0" b="0"/>
+      </a:effectRef>
+      <a:fontRef idx="minor">
+        <a:schemeClr val="lt1"/>
+      </a:fontRef>
+    </dgm:style>
+  </dgm:styleLbl>
+  <dgm:styleLbl name="asst3">
+    <dgm:scene3d>
+      <a:camera prst="orthographicFront"/>
+      <a:lightRig rig="threePt" dir="t"/>
+    </dgm:scene3d>
+    <dgm:sp3d/>
+    <dgm:txPr/>
+    <dgm:style>
+      <a:lnRef idx="2">
+        <a:scrgbClr r="0" g="0" b="0"/>
+      </a:lnRef>
+      <a:fillRef idx="1">
+        <a:scrgbClr r="0" g="0" b="0"/>
+      </a:fillRef>
+      <a:effectRef idx="0">
+        <a:scrgbClr r="0" g="0" b="0"/>
+      </a:effectRef>
+      <a:fontRef idx="minor">
+        <a:schemeClr val="lt1"/>
+      </a:fontRef>
+    </dgm:style>
+  </dgm:styleLbl>
+  <dgm:styleLbl name="asst4">
+    <dgm:scene3d>
+      <a:camera prst="orthographicFront"/>
+      <a:lightRig rig="threePt" dir="t"/>
+    </dgm:scene3d>
+    <dgm:sp3d/>
+    <dgm:txPr/>
+    <dgm:style>
+      <a:lnRef idx="2">
+        <a:scrgbClr r="0" g="0" b="0"/>
+      </a:lnRef>
+      <a:fillRef idx="1">
+        <a:scrgbClr r="0" g="0" b="0"/>
+      </a:fillRef>
+      <a:effectRef idx="0">
+        <a:scrgbClr r="0" g="0" b="0"/>
+      </a:effectRef>
+      <a:fontRef idx="minor">
+        <a:schemeClr val="lt1"/>
+      </a:fontRef>
+    </dgm:style>
+  </dgm:styleLbl>
+  <dgm:styleLbl name="parChTrans2D1">
+    <dgm:scene3d>
+      <a:camera prst="orthographicFront"/>
+      <a:lightRig rig="threePt" dir="t"/>
+    </dgm:scene3d>
+    <dgm:sp3d/>
+    <dgm:txPr/>
+    <dgm:style>
+      <a:lnRef idx="2">
+        <a:scrgbClr r="0" g="0" b="0"/>
+      </a:lnRef>
+      <a:fillRef idx="1">
+        <a:scrgbClr r="0" g="0" b="0"/>
+      </a:fillRef>
+      <a:effectRef idx="0">
+        <a:scrgbClr r="0" g="0" b="0"/>
+      </a:effectRef>
+      <a:fontRef idx="minor">
+        <a:schemeClr val="lt1"/>
+      </a:fontRef>
+    </dgm:style>
+  </dgm:styleLbl>
+  <dgm:styleLbl name="parChTrans2D2">
+    <dgm:scene3d>
+      <a:camera prst="orthographicFront"/>
+      <a:lightRig rig="threePt" dir="t"/>
+    </dgm:scene3d>
+    <dgm:sp3d/>
+    <dgm:txPr/>
+    <dgm:style>
+      <a:lnRef idx="2">
+        <a:scrgbClr r="0" g="0" b="0"/>
+      </a:lnRef>
+      <a:fillRef idx="1">
+        <a:scrgbClr r="0" g="0" b="0"/>
+      </a:fillRef>
+      <a:effectRef idx="0">
+        <a:scrgbClr r="0" g="0" b="0"/>
+      </a:effectRef>
+      <a:fontRef idx="minor">
+        <a:schemeClr val="lt1"/>
+      </a:fontRef>
+    </dgm:style>
+  </dgm:styleLbl>
+  <dgm:styleLbl name="parChTrans2D3">
+    <dgm:scene3d>
+      <a:camera prst="orthographicFront"/>
+      <a:lightRig rig="threePt" dir="t"/>
+    </dgm:scene3d>
+    <dgm:sp3d/>
+    <dgm:txPr/>
+    <dgm:style>
+      <a:lnRef idx="2">
+        <a:scrgbClr r="0" g="0" b="0"/>
+      </a:lnRef>
+      <a:fillRef idx="1">
+        <a:scrgbClr r="0" g="0" b="0"/>
+      </a:fillRef>
+      <a:effectRef idx="0">
+        <a:scrgbClr r="0" g="0" b="0"/>
+      </a:effectRef>
+      <a:fontRef idx="minor">
+        <a:schemeClr val="lt1"/>
+      </a:fontRef>
+    </dgm:style>
+  </dgm:styleLbl>
+  <dgm:styleLbl name="parChTrans2D4">
+    <dgm:scene3d>
+      <a:camera prst="orthographicFront"/>
+      <a:lightRig rig="threePt" dir="t"/>
+    </dgm:scene3d>
+    <dgm:sp3d/>
+    <dgm:txPr/>
+    <dgm:style>
+      <a:lnRef idx="2">
+        <a:scrgbClr r="0" g="0" b="0"/>
+      </a:lnRef>
+      <a:fillRef idx="1">
+        <a:scrgbClr r="0" g="0" b="0"/>
+      </a:fillRef>
+      <a:effectRef idx="0">
+        <a:scrgbClr r="0" g="0" b="0"/>
+      </a:effectRef>
+      <a:fontRef idx="minor">
+        <a:schemeClr val="lt1"/>
+      </a:fontRef>
+    </dgm:style>
+  </dgm:styleLbl>
+  <dgm:styleLbl name="parChTrans1D1">
+    <dgm:scene3d>
+      <a:camera prst="orthographicFront"/>
+      <a:lightRig rig="threePt" dir="t"/>
+    </dgm:scene3d>
+    <dgm:sp3d/>
+    <dgm:txPr/>
+    <dgm:style>
+      <a:lnRef idx="2">
+        <a:scrgbClr r="0" g="0" b="0"/>
+      </a:lnRef>
+      <a:fillRef idx="0">
+        <a:scrgbClr r="0" g="0" b="0"/>
+      </a:fillRef>
+      <a:effectRef idx="0">
+        <a:scrgbClr r="0" g="0" b="0"/>
+      </a:effectRef>
+      <a:fontRef idx="minor"/>
+    </dgm:style>
+  </dgm:styleLbl>
+  <dgm:styleLbl name="parChTrans1D2">
+    <dgm:scene3d>
+      <a:camera prst="orthographicFront"/>
+      <a:lightRig rig="threePt" dir="t"/>
+    </dgm:scene3d>
+    <dgm:sp3d/>
+    <dgm:txPr/>
+    <dgm:style>
+      <a:lnRef idx="2">
+        <a:scrgbClr r="0" g="0" b="0"/>
+      </a:lnRef>
+      <a:fillRef idx="0">
+        <a:scrgbClr r="0" g="0" b="0"/>
+      </a:fillRef>
+      <a:effectRef idx="0">
+        <a:scrgbClr r="0" g="0" b="0"/>
+      </a:effectRef>
+      <a:fontRef idx="minor"/>
+    </dgm:style>
+  </dgm:styleLbl>
+  <dgm:styleLbl name="parChTrans1D3">
+    <dgm:scene3d>
+      <a:camera prst="orthographicFront"/>
+      <a:lightRig rig="threePt" dir="t"/>
+    </dgm:scene3d>
+    <dgm:sp3d/>
+    <dgm:txPr/>
+    <dgm:style>
+      <a:lnRef idx="2">
+        <a:scrgbClr r="0" g="0" b="0"/>
+      </a:lnRef>
+      <a:fillRef idx="0">
+        <a:scrgbClr r="0" g="0" b="0"/>
+      </a:fillRef>
+      <a:effectRef idx="0">
+        <a:scrgbClr r="0" g="0" b="0"/>
+      </a:effectRef>
+      <a:fontRef idx="minor"/>
+    </dgm:style>
+  </dgm:styleLbl>
+  <dgm:styleLbl name="parChTrans1D4">
+    <dgm:scene3d>
+      <a:camera prst="orthographicFront"/>
+      <a:lightRig rig="threePt" dir="t"/>
+    </dgm:scene3d>
+    <dgm:sp3d/>
+    <dgm:txPr/>
+    <dgm:style>
+      <a:lnRef idx="2">
+        <a:scrgbClr r="0" g="0" b="0"/>
+      </a:lnRef>
+      <a:fillRef idx="0">
+        <a:scrgbClr r="0" g="0" b="0"/>
+      </a:fillRef>
+      <a:effectRef idx="0">
+        <a:scrgbClr r="0" g="0" b="0"/>
+      </a:effectRef>
+      <a:fontRef idx="minor"/>
+    </dgm:style>
+  </dgm:styleLbl>
+  <dgm:styleLbl name="fgAcc1">
+    <dgm:scene3d>
+      <a:camera prst="orthographicFront"/>
+      <a:lightRig rig="threePt" dir="t"/>
+    </dgm:scene3d>
+    <dgm:sp3d/>
+    <dgm:txPr/>
+    <dgm:style>
+      <a:lnRef idx="2">
+        <a:scrgbClr r="0" g="0" b="0"/>
+      </a:lnRef>
+      <a:fillRef idx="1">
+        <a:scrgbClr r="0" g="0" b="0"/>
+      </a:fillRef>
+      <a:effectRef idx="0">
+        <a:scrgbClr r="0" g="0" b="0"/>
+      </a:effectRef>
+      <a:fontRef idx="minor"/>
+    </dgm:style>
+  </dgm:styleLbl>
+  <dgm:styleLbl name="conFgAcc1">
+    <dgm:scene3d>
+      <a:camera prst="orthographicFront"/>
+      <a:lightRig rig="threePt" dir="t"/>
+    </dgm:scene3d>
+    <dgm:sp3d/>
+    <dgm:txPr/>
+    <dgm:style>
+      <a:lnRef idx="2">
+        <a:scrgbClr r="0" g="0" b="0"/>
+      </a:lnRef>
+      <a:fillRef idx="1">
+        <a:scrgbClr r="0" g="0" b="0"/>
+      </a:fillRef>
+      <a:effectRef idx="0">
+        <a:scrgbClr r="0" g="0" b="0"/>
+      </a:effectRef>
+      <a:fontRef idx="minor"/>
+    </dgm:style>
+  </dgm:styleLbl>
+  <dgm:styleLbl name="alignAcc1">
+    <dgm:scene3d>
+      <a:camera prst="orthographicFront"/>
+      <a:lightRig rig="threePt" dir="t"/>
+    </dgm:scene3d>
+    <dgm:sp3d/>
+    <dgm:txPr/>
+    <dgm:style>
+      <a:lnRef idx="2">
+        <a:scrgbClr r="0" g="0" b="0"/>
+      </a:lnRef>
+      <a:fillRef idx="1">
+        <a:scrgbClr r="0" g="0" b="0"/>
+      </a:fillRef>
+      <a:effectRef idx="0">
+        <a:scrgbClr r="0" g="0" b="0"/>
+      </a:effectRef>
+      <a:fontRef idx="minor"/>
+    </dgm:style>
+  </dgm:styleLbl>
+  <dgm:styleLbl name="trAlignAcc1">
+    <dgm:scene3d>
+      <a:camera prst="orthographicFront"/>
+      <a:lightRig rig="threePt" dir="t"/>
+    </dgm:scene3d>
+    <dgm:sp3d/>
+    <dgm:txPr/>
+    <dgm:style>
+      <a:lnRef idx="1">
+        <a:scrgbClr r="0" g="0" b="0"/>
+      </a:lnRef>
+      <a:fillRef idx="1">
+        <a:scrgbClr r="0" g="0" b="0"/>
+      </a:fillRef>
+      <a:effectRef idx="0">
+        <a:scrgbClr r="0" g="0" b="0"/>
+      </a:effectRef>
+      <a:fontRef idx="minor"/>
+    </dgm:style>
+  </dgm:styleLbl>
+  <dgm:styleLbl name="bgAcc1">
+    <dgm:scene3d>
+      <a:camera prst="orthographicFront"/>
+      <a:lightRig rig="threePt" dir="t"/>
+    </dgm:scene3d>
+    <dgm:sp3d/>
+    <dgm:txPr/>
+    <dgm:style>
+      <a:lnRef idx="2">
+        <a:scrgbClr r="0" g="0" b="0"/>
+      </a:lnRef>
+      <a:fillRef idx="1">
+        <a:scrgbClr r="0" g="0" b="0"/>
+      </a:fillRef>
+      <a:effectRef idx="0">
+        <a:scrgbClr r="0" g="0" b="0"/>
+      </a:effectRef>
+      <a:fontRef idx="minor"/>
+    </dgm:style>
+  </dgm:styleLbl>
+  <dgm:styleLbl name="solidFgAcc1">
+    <dgm:scene3d>
+      <a:camera prst="orthographicFront"/>
+      <a:lightRig rig="threePt" dir="t"/>
+    </dgm:scene3d>
+    <dgm:sp3d/>
+    <dgm:txPr/>
+    <dgm:style>
+      <a:lnRef idx="2">
+        <a:scrgbClr r="0" g="0" b="0"/>
+      </a:lnRef>
+      <a:fillRef idx="1">
+        <a:scrgbClr r="0" g="0" b="0"/>
+      </a:fillRef>
+      <a:effectRef idx="0">
+        <a:scrgbClr r="0" g="0" b="0"/>
+      </a:effectRef>
+      <a:fontRef idx="minor"/>
+    </dgm:style>
+  </dgm:styleLbl>
+  <dgm:styleLbl name="solidAlignAcc1">
+    <dgm:scene3d>
+      <a:camera prst="orthographicFront"/>
+      <a:lightRig rig="threePt" dir="t"/>
+    </dgm:scene3d>
+    <dgm:sp3d/>
+    <dgm:txPr/>
+    <dgm:style>
+      <a:lnRef idx="2">
+        <a:scrgbClr r="0" g="0" b="0"/>
+      </a:lnRef>
+      <a:fillRef idx="1">
+        <a:scrgbClr r="0" g="0" b="0"/>
+      </a:fillRef>
+      <a:effectRef idx="0">
+        <a:scrgbClr r="0" g="0" b="0"/>
+      </a:effectRef>
+      <a:fontRef idx="minor"/>
+    </dgm:style>
+  </dgm:styleLbl>
+  <dgm:styleLbl name="solidBgAcc1">
+    <dgm:scene3d>
+      <a:camera prst="orthographicFront"/>
+      <a:lightRig rig="threePt" dir="t"/>
+    </dgm:scene3d>
+    <dgm:sp3d/>
+    <dgm:txPr/>
+    <dgm:style>
+      <a:lnRef idx="2">
+        <a:scrgbClr r="0" g="0" b="0"/>
+      </a:lnRef>
+      <a:fillRef idx="1">
+        <a:scrgbClr r="0" g="0" b="0"/>
+      </a:fillRef>
+      <a:effectRef idx="0">
+        <a:scrgbClr r="0" g="0" b="0"/>
+      </a:effectRef>
+      <a:fontRef idx="minor"/>
+    </dgm:style>
+  </dgm:styleLbl>
+  <dgm:styleLbl name="fgAccFollowNode1">
+    <dgm:scene3d>
+      <a:camera prst="orthographicFront"/>
+      <a:lightRig rig="threePt" dir="t"/>
+    </dgm:scene3d>
+    <dgm:sp3d/>
+    <dgm:txPr/>
+    <dgm:style>
+      <a:lnRef idx="2">
+        <a:scrgbClr r="0" g="0" b="0"/>
+      </a:lnRef>
+      <a:fillRef idx="1">
+        <a:scrgbClr r="0" g="0" b="0"/>
+      </a:fillRef>
+      <a:effectRef idx="0">
+        <a:scrgbClr r="0" g="0" b="0"/>
+      </a:effectRef>
+      <a:fontRef idx="minor"/>
+    </dgm:style>
+  </dgm:styleLbl>
+  <dgm:styleLbl name="alignAccFollowNode1">
+    <dgm:scene3d>
+      <a:camera prst="orthographicFront"/>
+      <a:lightRig rig="threePt" dir="t"/>
+    </dgm:scene3d>
+    <dgm:sp3d/>
+    <dgm:txPr/>
+    <dgm:style>
+      <a:lnRef idx="2">
+        <a:scrgbClr r="0" g="0" b="0"/>
+      </a:lnRef>
+      <a:fillRef idx="1">
+        <a:scrgbClr r="0" g="0" b="0"/>
+      </a:fillRef>
+      <a:effectRef idx="0">
+        <a:scrgbClr r="0" g="0" b="0"/>
+      </a:effectRef>
+      <a:fontRef idx="minor"/>
+    </dgm:style>
+  </dgm:styleLbl>
+  <dgm:styleLbl name="bgAccFollowNode1">
+    <dgm:scene3d>
+      <a:camera prst="orthographicFront"/>
+      <a:lightRig rig="threePt" dir="t"/>
+    </dgm:scene3d>
+    <dgm:sp3d/>
+    <dgm:txPr/>
+    <dgm:style>
+      <a:lnRef idx="2">
+        <a:scrgbClr r="0" g="0" b="0"/>
+      </a:lnRef>
+      <a:fillRef idx="1">
+        <a:scrgbClr r="0" g="0" b="0"/>
+      </a:fillRef>
+      <a:effectRef idx="0">
+        <a:scrgbClr r="0" g="0" b="0"/>
+      </a:effectRef>
+      <a:fontRef idx="minor"/>
+    </dgm:style>
+  </dgm:styleLbl>
+  <dgm:styleLbl name="fgAcc0">
+    <dgm:scene3d>
+      <a:camera prst="orthographicFront"/>
+      <a:lightRig rig="threePt" dir="t"/>
+    </dgm:scene3d>
+    <dgm:sp3d/>
+    <dgm:txPr/>
+    <dgm:style>
+      <a:lnRef idx="2">
+        <a:scrgbClr r="0" g="0" b="0"/>
+      </a:lnRef>
+      <a:fillRef idx="1">
+        <a:scrgbClr r="0" g="0" b="0"/>
+      </a:fillRef>
+      <a:effectRef idx="0">
+        <a:scrgbClr r="0" g="0" b="0"/>
+      </a:effectRef>
+      <a:fontRef idx="minor"/>
+    </dgm:style>
+  </dgm:styleLbl>
+  <dgm:styleLbl name="fgAcc2">
+    <dgm:scene3d>
+      <a:camera prst="orthographicFront"/>
+      <a:lightRig rig="threePt" dir="t"/>
+    </dgm:scene3d>
+    <dgm:sp3d/>
+    <dgm:txPr/>
+    <dgm:style>
+      <a:lnRef idx="2">
+        <a:scrgbClr r="0" g="0" b="0"/>
+      </a:lnRef>
+      <a:fillRef idx="1">
+        <a:scrgbClr r="0" g="0" b="0"/>
+      </a:fillRef>
+      <a:effectRef idx="0">
+        <a:scrgbClr r="0" g="0" b="0"/>
+      </a:effectRef>
+      <a:fontRef idx="minor"/>
+    </dgm:style>
+  </dgm:styleLbl>
+  <dgm:styleLbl name="fgAcc3">
+    <dgm:scene3d>
+      <a:camera prst="orthographicFront"/>
+      <a:lightRig rig="threePt" dir="t"/>
+    </dgm:scene3d>
+    <dgm:sp3d/>
+    <dgm:txPr/>
+    <dgm:style>
+      <a:lnRef idx="2">
+        <a:scrgbClr r="0" g="0" b="0"/>
+      </a:lnRef>
+      <a:fillRef idx="1">
+        <a:scrgbClr r="0" g="0" b="0"/>
+      </a:fillRef>
+      <a:effectRef idx="0">
+        <a:scrgbClr r="0" g="0" b="0"/>
+      </a:effectRef>
+      <a:fontRef idx="minor"/>
+    </dgm:style>
+  </dgm:styleLbl>
+  <dgm:styleLbl name="fgAcc4">
+    <dgm:scene3d>
+      <a:camera prst="orthographicFront"/>
+      <a:lightRig rig="threePt" dir="t"/>
+    </dgm:scene3d>
+    <dgm:sp3d/>
+    <dgm:txPr/>
+    <dgm:style>
+      <a:lnRef idx="2">
+        <a:scrgbClr r="0" g="0" b="0"/>
+      </a:lnRef>
+      <a:fillRef idx="1">
+        <a:scrgbClr r="0" g="0" b="0"/>
+      </a:fillRef>
+      <a:effectRef idx="0">
+        <a:scrgbClr r="0" g="0" b="0"/>
+      </a:effectRef>
+      <a:fontRef idx="minor"/>
+    </dgm:style>
+  </dgm:styleLbl>
+  <dgm:styleLbl name="bgShp">
+    <dgm:scene3d>
+      <a:camera prst="orthographicFront"/>
+      <a:lightRig rig="threePt" dir="t"/>
+    </dgm:scene3d>
+    <dgm:sp3d/>
+    <dgm:txPr/>
+    <dgm:style>
+      <a:lnRef idx="0">
+        <a:scrgbClr r="0" g="0" b="0"/>
+      </a:lnRef>
+      <a:fillRef idx="1">
+        <a:scrgbClr r="0" g="0" b="0"/>
+      </a:fillRef>
+      <a:effectRef idx="0">
+        <a:scrgbClr r="0" g="0" b="0"/>
+      </a:effectRef>
+      <a:fontRef idx="minor"/>
+    </dgm:style>
+  </dgm:styleLbl>
+  <dgm:styleLbl name="dkBgShp">
+    <dgm:scene3d>
+      <a:camera prst="orthographicFront"/>
+      <a:lightRig rig="threePt" dir="t"/>
+    </dgm:scene3d>
+    <dgm:sp3d/>
+    <dgm:txPr/>
+    <dgm:style>
+      <a:lnRef idx="0">
+        <a:scrgbClr r="0" g="0" b="0"/>
+      </a:lnRef>
+      <a:fillRef idx="1">
+        <a:scrgbClr r="0" g="0" b="0"/>
+      </a:fillRef>
+      <a:effectRef idx="0">
+        <a:scrgbClr r="0" g="0" b="0"/>
+      </a:effectRef>
+      <a:fontRef idx="minor"/>
+    </dgm:style>
+  </dgm:styleLbl>
+  <dgm:styleLbl name="trBgShp">
+    <dgm:scene3d>
+      <a:camera prst="orthographicFront"/>
+      <a:lightRig rig="threePt" dir="t"/>
+    </dgm:scene3d>
+    <dgm:sp3d/>
+    <dgm:txPr/>
+    <dgm:style>
+      <a:lnRef idx="0">
+        <a:scrgbClr r="0" g="0" b="0"/>
+      </a:lnRef>
+      <a:fillRef idx="1">
+        <a:scrgbClr r="0" g="0" b="0"/>
+      </a:fillRef>
+      <a:effectRef idx="0">
+        <a:scrgbClr r="0" g="0" b="0"/>
+      </a:effectRef>
+      <a:fontRef idx="minor"/>
+    </dgm:style>
+  </dgm:styleLbl>
+  <dgm:styleLbl name="fgShp">
+    <dgm:scene3d>
+      <a:camera prst="orthographicFront"/>
+      <a:lightRig rig="threePt" dir="t"/>
+    </dgm:scene3d>
+    <dgm:sp3d/>
+    <dgm:txPr/>
+    <dgm:style>
+      <a:lnRef idx="2">
+        <a:scrgbClr r="0" g="0" b="0"/>
+      </a:lnRef>
+      <a:fillRef idx="1">
+        <a:scrgbClr r="0" g="0" b="0"/>
+      </a:fillRef>
+      <a:effectRef idx="0">
+        <a:scrgbClr r="0" g="0" b="0"/>
+      </a:effectRef>
+      <a:fontRef idx="minor"/>
+    </dgm:style>
+  </dgm:styleLbl>
+  <dgm:styleLbl name="revTx">
+    <dgm:scene3d>
+      <a:camera prst="orthographicFront"/>
+      <a:lightRig rig="threePt" dir="t"/>
+    </dgm:scene3d>
+    <dgm:sp3d/>
+    <dgm:txPr/>
+    <dgm:style>
+      <a:lnRef idx="0">
+        <a:scrgbClr r="0" g="0" b="0"/>
+      </a:lnRef>
+      <a:fillRef idx="0">
+        <a:scrgbClr r="0" g="0" b="0"/>
+      </a:fillRef>
+      <a:effectRef idx="0">
+        <a:scrgbClr r="0" g="0" b="0"/>
+      </a:effectRef>
+      <a:fontRef idx="minor"/>
+    </dgm:style>
+  </dgm:styleLbl>
+</dgm:styleDef>
+</file>
+
+<file path=ppt/diagrams/quickStyle20.xml><?xml version="1.0" encoding="utf-8"?>
 <dgm:styleDef xmlns:dgm="http://schemas.openxmlformats.org/drawingml/2006/diagram" xmlns:a="http://schemas.openxmlformats.org/drawingml/2006/main" uniqueId="urn:microsoft.com/office/officeart/2005/8/quickstyle/simple1">
   <dgm:title val=""/>
   <dgm:desc val=""/>
@@ -26620,7 +28549,7 @@
               <p:nvPr>
                 <p:extLst>
                   <p:ext uri="{D42A27DB-BD31-4B8C-83A1-F6EECF244321}">
-                    <p14:modId xmlns:p14="http://schemas.microsoft.com/office/powerpoint/2010/main" val="2248233996"/>
+                    <p14:modId xmlns:p14="http://schemas.microsoft.com/office/powerpoint/2010/main" val="1292537306"/>
                   </p:ext>
                 </p:extLst>
               </p:nvPr>
@@ -26650,7 +28579,7 @@
               <p:nvPr>
                 <p:extLst>
                   <p:ext uri="{D42A27DB-BD31-4B8C-83A1-F6EECF244321}">
-                    <p14:modId xmlns:p14="http://schemas.microsoft.com/office/powerpoint/2010/main" val="2248233996"/>
+                    <p14:modId xmlns:p14="http://schemas.microsoft.com/office/powerpoint/2010/main" val="1292537306"/>
                   </p:ext>
                 </p:extLst>
               </p:nvPr>
@@ -26667,8 +28596,8 @@
           </p:graphicFrame>
         </mc:Fallback>
       </mc:AlternateContent>
-      <mc:AlternateContent xmlns:mc="http://schemas.openxmlformats.org/markup-compatibility/2006">
-        <mc:Choice xmlns:a14="http://schemas.microsoft.com/office/drawing/2010/main" Requires="a14">
+      <mc:AlternateContent xmlns:mc="http://schemas.openxmlformats.org/markup-compatibility/2006" xmlns:a14="http://schemas.microsoft.com/office/drawing/2010/main">
+        <mc:Choice Requires="a14">
           <p:graphicFrame>
             <p:nvGraphicFramePr>
               <p:cNvPr id="16" name="Diagram 15">
@@ -26698,7 +28627,7 @@
             </a:graphic>
           </p:graphicFrame>
         </mc:Choice>
-        <mc:Fallback>
+        <mc:Fallback xmlns="">
           <p:graphicFrame>
             <p:nvGraphicFramePr>
               <p:cNvPr id="16" name="Diagram 15">
@@ -26723,7 +28652,7 @@
             </p:xfrm>
             <a:graphic>
               <a:graphicData uri="http://schemas.openxmlformats.org/drawingml/2006/diagram">
-                <dgm:relIds xmlns:dgm="http://schemas.openxmlformats.org/drawingml/2006/diagram" xmlns:r="http://schemas.openxmlformats.org/officeDocument/2006/relationships" r:dm="rId14" r:lo="rId10" r:qs="rId11" r:cs="rId12"/>
+                <dgm:relIds xmlns:dgm="http://schemas.openxmlformats.org/drawingml/2006/diagram" xmlns:r="http://schemas.openxmlformats.org/officeDocument/2006/relationships" r:dm="rId14" r:lo="rId15" r:qs="rId16" r:cs="rId17"/>
               </a:graphicData>
             </a:graphic>
           </p:graphicFrame>
@@ -26744,7 +28673,7 @@
           <p:nvPr/>
         </p:nvPicPr>
         <p:blipFill>
-          <a:blip r:embed="rId15"/>
+          <a:blip r:embed="rId18"/>
           <a:stretch>
             <a:fillRect/>
           </a:stretch>
@@ -26774,7 +28703,7 @@
           <p:nvPr/>
         </p:nvPicPr>
         <p:blipFill>
-          <a:blip r:embed="rId16"/>
+          <a:blip r:embed="rId19"/>
           <a:stretch>
             <a:fillRect/>
           </a:stretch>
@@ -26804,7 +28733,7 @@
           <p:nvPr/>
         </p:nvPicPr>
         <p:blipFill>
-          <a:blip r:embed="rId17"/>
+          <a:blip r:embed="rId20"/>
           <a:stretch>
             <a:fillRect/>
           </a:stretch>
@@ -27061,7 +28990,7 @@
           <p:nvPr/>
         </p:nvPicPr>
         <p:blipFill>
-          <a:blip r:embed="rId18"/>
+          <a:blip r:embed="rId21"/>
           <a:stretch>
             <a:fillRect/>
           </a:stretch>
@@ -27628,34 +29557,6 @@
 </file>
 
 <file path=customXml/item1.xml><?xml version="1.0" encoding="utf-8"?>
-<?mso-contentType ?>
-<FormTemplates xmlns="http://schemas.microsoft.com/sharepoint/v3/contenttype/forms">
-  <Display>DocumentLibraryForm</Display>
-  <Edit>DocumentLibraryForm</Edit>
-  <New>DocumentLibraryForm</New>
-</FormTemplates>
-</file>
-
-<file path=customXml/item2.xml><?xml version="1.0" encoding="utf-8"?>
-<p:properties xmlns:p="http://schemas.microsoft.com/office/2006/metadata/properties" xmlns:xsi="http://www.w3.org/2001/XMLSchema-instance" xmlns:pc="http://schemas.microsoft.com/office/infopath/2007/PartnerControls">
-  <documentManagement>
-    <TaxCatchAll xmlns="bfac00ad-cf50-4b2f-bc6d-6973bf4a0f43" xsi:nil="true"/>
-    <lcf76f155ced4ddcb4097134ff3c332f xmlns="16e6069a-04c5-46f1-8e4a-493411be9f6d">
-      <Terms xmlns="http://schemas.microsoft.com/office/infopath/2007/PartnerControls"/>
-    </lcf76f155ced4ddcb4097134ff3c332f>
-    <MediaLengthInSeconds xmlns="16e6069a-04c5-46f1-8e4a-493411be9f6d" xsi:nil="true"/>
-    <SharedWithUsers xmlns="bfac00ad-cf50-4b2f-bc6d-6973bf4a0f43">
-      <UserInfo>
-        <DisplayName/>
-        <AccountId xsi:nil="true"/>
-        <AccountType/>
-      </UserInfo>
-    </SharedWithUsers>
-  </documentManagement>
-</p:properties>
-</file>
-
-<file path=customXml/item3.xml><?xml version="1.0" encoding="utf-8"?>
 <ct:contentTypeSchema xmlns:ct="http://schemas.microsoft.com/office/2006/metadata/contentType" xmlns:ma="http://schemas.microsoft.com/office/2006/metadata/properties/metaAttributes" ct:_="" ma:_="" ma:contentTypeName="Document" ma:contentTypeID="0x01010005A56DD4EE0B0A4DBAEBE68C9E02E2DA" ma:contentTypeVersion="16" ma:contentTypeDescription="Create a new document." ma:contentTypeScope="" ma:versionID="1d1873553741447fdb32ea7768c80fea">
   <xsd:schema xmlns:xsd="http://www.w3.org/2001/XMLSchema" xmlns:xs="http://www.w3.org/2001/XMLSchema" xmlns:p="http://schemas.microsoft.com/office/2006/metadata/properties" xmlns:ns2="16e6069a-04c5-46f1-8e4a-493411be9f6d" xmlns:ns3="bfac00ad-cf50-4b2f-bc6d-6973bf4a0f43" targetNamespace="http://schemas.microsoft.com/office/2006/metadata/properties" ma:root="true" ma:fieldsID="d2112e1c27161dc758182e1d7242e48c" ns2:_="" ns3:_="">
     <xsd:import namespace="16e6069a-04c5-46f1-8e4a-493411be9f6d"/>
@@ -27898,10 +29799,49 @@
 </ct:contentTypeSchema>
 </file>
 
+<file path=customXml/item2.xml><?xml version="1.0" encoding="utf-8"?>
+<p:properties xmlns:p="http://schemas.microsoft.com/office/2006/metadata/properties" xmlns:xsi="http://www.w3.org/2001/XMLSchema-instance" xmlns:pc="http://schemas.microsoft.com/office/infopath/2007/PartnerControls">
+  <documentManagement>
+    <TaxCatchAll xmlns="bfac00ad-cf50-4b2f-bc6d-6973bf4a0f43" xsi:nil="true"/>
+    <lcf76f155ced4ddcb4097134ff3c332f xmlns="16e6069a-04c5-46f1-8e4a-493411be9f6d">
+      <Terms xmlns="http://schemas.microsoft.com/office/infopath/2007/PartnerControls"/>
+    </lcf76f155ced4ddcb4097134ff3c332f>
+    <MediaLengthInSeconds xmlns="16e6069a-04c5-46f1-8e4a-493411be9f6d" xsi:nil="true"/>
+    <SharedWithUsers xmlns="bfac00ad-cf50-4b2f-bc6d-6973bf4a0f43">
+      <UserInfo>
+        <DisplayName/>
+        <AccountId xsi:nil="true"/>
+        <AccountType/>
+      </UserInfo>
+    </SharedWithUsers>
+  </documentManagement>
+</p:properties>
+</file>
+
+<file path=customXml/item3.xml><?xml version="1.0" encoding="utf-8"?>
+<?mso-contentType ?>
+<FormTemplates xmlns="http://schemas.microsoft.com/sharepoint/v3/contenttype/forms">
+  <Display>DocumentLibraryForm</Display>
+  <Edit>DocumentLibraryForm</Edit>
+  <New>DocumentLibraryForm</New>
+</FormTemplates>
+</file>
+
 <file path=customXml/itemProps1.xml><?xml version="1.0" encoding="utf-8"?>
-<ds:datastoreItem xmlns:ds="http://schemas.openxmlformats.org/officeDocument/2006/customXml" ds:itemID="{B45319B8-C3BC-4B6C-B42C-8F122373415D}">
+<ds:datastoreItem xmlns:ds="http://schemas.openxmlformats.org/officeDocument/2006/customXml" ds:itemID="{BF85B3B8-BB2A-4E48-9EB0-C1C86BC025A0}">
   <ds:schemaRefs>
-    <ds:schemaRef ds:uri="http://schemas.microsoft.com/sharepoint/v3/contenttype/forms"/>
+    <ds:schemaRef ds:uri="http://schemas.microsoft.com/office/2006/metadata/contentType"/>
+    <ds:schemaRef ds:uri="http://schemas.microsoft.com/office/2006/metadata/properties/metaAttributes"/>
+    <ds:schemaRef ds:uri="http://www.w3.org/2001/XMLSchema"/>
+    <ds:schemaRef ds:uri="http://schemas.microsoft.com/office/2006/metadata/properties"/>
+    <ds:schemaRef ds:uri="16e6069a-04c5-46f1-8e4a-493411be9f6d"/>
+    <ds:schemaRef ds:uri="bfac00ad-cf50-4b2f-bc6d-6973bf4a0f43"/>
+    <ds:schemaRef ds:uri="http://schemas.microsoft.com/office/2006/documentManagement/types"/>
+    <ds:schemaRef ds:uri="http://schemas.microsoft.com/office/infopath/2007/PartnerControls"/>
+    <ds:schemaRef ds:uri="http://schemas.openxmlformats.org/package/2006/metadata/core-properties"/>
+    <ds:schemaRef ds:uri="http://purl.org/dc/elements/1.1/"/>
+    <ds:schemaRef ds:uri="http://purl.org/dc/terms/"/>
+    <ds:schemaRef ds:uri="http://schemas.microsoft.com/internal/obd"/>
   </ds:schemaRefs>
 </ds:datastoreItem>
 </file>
@@ -27924,20 +29864,9 @@
 </file>
 
 <file path=customXml/itemProps3.xml><?xml version="1.0" encoding="utf-8"?>
-<ds:datastoreItem xmlns:ds="http://schemas.openxmlformats.org/officeDocument/2006/customXml" ds:itemID="{BF85B3B8-BB2A-4E48-9EB0-C1C86BC025A0}">
+<ds:datastoreItem xmlns:ds="http://schemas.openxmlformats.org/officeDocument/2006/customXml" ds:itemID="{B45319B8-C3BC-4B6C-B42C-8F122373415D}">
   <ds:schemaRefs>
-    <ds:schemaRef ds:uri="http://schemas.microsoft.com/office/2006/metadata/contentType"/>
-    <ds:schemaRef ds:uri="http://schemas.microsoft.com/office/2006/metadata/properties/metaAttributes"/>
-    <ds:schemaRef ds:uri="http://www.w3.org/2001/XMLSchema"/>
-    <ds:schemaRef ds:uri="http://schemas.microsoft.com/office/2006/metadata/properties"/>
-    <ds:schemaRef ds:uri="16e6069a-04c5-46f1-8e4a-493411be9f6d"/>
-    <ds:schemaRef ds:uri="bfac00ad-cf50-4b2f-bc6d-6973bf4a0f43"/>
-    <ds:schemaRef ds:uri="http://schemas.microsoft.com/office/2006/documentManagement/types"/>
-    <ds:schemaRef ds:uri="http://schemas.microsoft.com/office/infopath/2007/PartnerControls"/>
-    <ds:schemaRef ds:uri="http://schemas.openxmlformats.org/package/2006/metadata/core-properties"/>
-    <ds:schemaRef ds:uri="http://purl.org/dc/elements/1.1/"/>
-    <ds:schemaRef ds:uri="http://purl.org/dc/terms/"/>
-    <ds:schemaRef ds:uri="http://schemas.microsoft.com/internal/obd"/>
+    <ds:schemaRef ds:uri="http://schemas.microsoft.com/sharepoint/v3/contenttype/forms"/>
   </ds:schemaRefs>
 </ds:datastoreItem>
 </file>